--- a/dormeo-us/deck/2026-10-24/Dormeo-US-Weekly-Business-Review-Week-43-2026-10-24.pptx
+++ b/dormeo-us/deck/2026-10-24/Dormeo-US-Weekly-Business-Review-Week-43-2026-10-24.pptx
@@ -772,33 +772,9 @@
           </a:ln>
         </p:spPr>
       </p:sp>
-      <p:sp>
-        <p:nvSpPr>
-          <p:cNvPr id="4" name=""/>
-          <p:cNvSpPr/>
-          <p:nvPr/>
-        </p:nvSpPr>
-        <p:spPr>
-          <a:xfrm>
-            <a:off x="822960" y="640080"/>
-            <a:ext cx="2743200" cy="685800"/>
-          </a:xfrm>
-          <a:prstGeom prst="roundRect">
-            <a:avLst>
-              <a:gd name="" fmla="val 6000"/>
-            </a:avLst>
-          </a:prstGeom>
-          <a:solidFill>
-            <a:srgbClr val="FFFFFF"/>
-          </a:solidFill>
-          <a:ln>
-            <a:noFill/>
-          </a:ln>
-        </p:spPr>
-      </p:sp>
       <p:pic>
         <p:nvPicPr>
-          <p:cNvPr id="5" name="" descr="logo_s.png"/>
+          <p:cNvPr id="4" name="" descr="logo_dark_s.png"/>
           <p:cNvPicPr>
             <a:picLocks noChangeAspect="1"/>
           </p:cNvPicPr>
@@ -812,8 +788,8 @@
         </p:blipFill>
         <p:spPr>
           <a:xfrm>
-            <a:off x="1005840" y="749808"/>
-            <a:ext cx="2377440" cy="416052"/>
+            <a:off x="822960" y="777240"/>
+            <a:ext cx="2560320" cy="312928"/>
           </a:xfrm>
           <a:prstGeom prst="rect">
             <a:avLst/>
@@ -822,7 +798,7 @@
       </p:pic>
       <p:sp>
         <p:nvSpPr>
-          <p:cNvPr id="6" name=""/>
+          <p:cNvPr id="5" name=""/>
           <p:cNvSpPr txBox="1"/>
           <p:nvPr/>
         </p:nvSpPr>
@@ -857,7 +833,7 @@
       </p:sp>
       <p:sp>
         <p:nvSpPr>
-          <p:cNvPr id="7" name=""/>
+          <p:cNvPr id="6" name=""/>
           <p:cNvSpPr txBox="1"/>
           <p:nvPr/>
         </p:nvSpPr>
@@ -892,7 +868,7 @@
       </p:sp>
       <p:sp>
         <p:nvSpPr>
-          <p:cNvPr id="8" name=""/>
+          <p:cNvPr id="7" name=""/>
           <p:cNvSpPr txBox="1"/>
           <p:nvPr/>
         </p:nvSpPr>
@@ -927,7 +903,7 @@
       </p:sp>
       <p:sp>
         <p:nvSpPr>
-          <p:cNvPr id="9" name=""/>
+          <p:cNvPr id="8" name=""/>
           <p:cNvSpPr txBox="1"/>
           <p:nvPr/>
         </p:nvSpPr>
@@ -956,63 +932,6 @@
                 <a:latin typeface="Inter"/>
               </a:rPr>
               <a:t>Week ending Saturday, October 24, 2026  ·  Oct 18–24, 2026</a:t>
-            </a:r>
-          </a:p>
-        </p:txBody>
-      </p:sp>
-      <p:sp>
-        <p:nvSpPr>
-          <p:cNvPr id="10" name=""/>
-          <p:cNvSpPr/>
-          <p:nvPr/>
-        </p:nvSpPr>
-        <p:spPr>
-          <a:xfrm>
-            <a:off x="822960" y="5623560"/>
-            <a:ext cx="10515600" cy="9144"/>
-          </a:xfrm>
-          <a:prstGeom prst="rect">
-            <a:avLst/>
-          </a:prstGeom>
-          <a:solidFill>
-            <a:srgbClr val="334155"/>
-          </a:solidFill>
-          <a:ln>
-            <a:noFill/>
-          </a:ln>
-        </p:spPr>
-      </p:sp>
-      <p:sp>
-        <p:nvSpPr>
-          <p:cNvPr id="11" name=""/>
-          <p:cNvSpPr txBox="1"/>
-          <p:nvPr/>
-        </p:nvSpPr>
-        <p:spPr>
-          <a:xfrm>
-            <a:off x="822960" y="5760720"/>
-            <a:ext cx="7315200" cy="365760"/>
-          </a:xfrm>
-          <a:prstGeom prst="rect">
-            <a:avLst/>
-          </a:prstGeom>
-          <a:noFill/>
-        </p:spPr>
-        <p:txBody>
-          <a:bodyPr wrap="square" lIns="36576" rIns="36576" tIns="18288" bIns="18288" anchor="t">
-            <a:spAutoFit/>
-          </a:bodyPr>
-          <a:lstStyle/>
-          <a:p>
-            <a:pPr algn="l"/>
-            <a:r>
-              <a:rPr sz="1100" b="0">
-                <a:solidFill>
-                  <a:srgbClr val="94A3B8"/>
-                </a:solidFill>
-                <a:latin typeface="Inter"/>
-              </a:rPr>
-              <a:t>Prepared by Flagship Growth  ·  Data: Sellerise (Amazon US) and the Dormeo inventory tracker</a:t>
             </a:r>
           </a:p>
         </p:txBody>
@@ -7393,7 +7312,7 @@
         <p:spPr>
           <a:xfrm>
             <a:off x="3429000" y="1371600"/>
-            <a:ext cx="4754880" cy="274320"/>
+            <a:ext cx="8211312" cy="274320"/>
           </a:xfrm>
           <a:prstGeom prst="rect">
             <a:avLst/>
@@ -7555,7 +7474,7 @@
         <p:spPr>
           <a:xfrm>
             <a:off x="5257800" y="2374925"/>
-            <a:ext cx="268224" cy="313639"/>
+            <a:ext cx="729081" cy="313639"/>
           </a:xfrm>
           <a:prstGeom prst="rect">
             <a:avLst/>
@@ -7576,7 +7495,7 @@
         </p:nvSpPr>
         <p:spPr>
           <a:xfrm>
-            <a:off x="5580887" y="2251710"/>
+            <a:off x="6041745" y="2251710"/>
             <a:ext cx="914400" cy="560070"/>
           </a:xfrm>
           <a:prstGeom prst="rect">
@@ -7647,7 +7566,7 @@
         <p:spPr>
           <a:xfrm>
             <a:off x="5257800" y="2934995"/>
-            <a:ext cx="663575" cy="313639"/>
+            <a:ext cx="1803717" cy="313639"/>
           </a:xfrm>
           <a:prstGeom prst="rect">
             <a:avLst/>
@@ -7668,7 +7587,7 @@
         </p:nvSpPr>
         <p:spPr>
           <a:xfrm>
-            <a:off x="5976239" y="2811780"/>
+            <a:off x="7116381" y="2811780"/>
             <a:ext cx="914400" cy="560070"/>
           </a:xfrm>
           <a:prstGeom prst="rect">
@@ -7739,7 +7658,7 @@
         <p:spPr>
           <a:xfrm>
             <a:off x="5257800" y="3495065"/>
-            <a:ext cx="907228" cy="313639"/>
+            <a:ext cx="2466011" cy="313639"/>
           </a:xfrm>
           <a:prstGeom prst="rect">
             <a:avLst/>
@@ -7760,7 +7679,7 @@
         </p:nvSpPr>
         <p:spPr>
           <a:xfrm>
-            <a:off x="6219892" y="3371850"/>
+            <a:off x="7778675" y="3371850"/>
             <a:ext cx="914400" cy="560070"/>
           </a:xfrm>
           <a:prstGeom prst="rect">
@@ -7831,7 +7750,7 @@
         <p:spPr>
           <a:xfrm>
             <a:off x="5257800" y="4055135"/>
-            <a:ext cx="458216" cy="313639"/>
+            <a:ext cx="1245514" cy="313639"/>
           </a:xfrm>
           <a:prstGeom prst="rect">
             <a:avLst/>
@@ -7852,7 +7771,7 @@
         </p:nvSpPr>
         <p:spPr>
           <a:xfrm>
-            <a:off x="5770880" y="3931920"/>
+            <a:off x="6558178" y="3931920"/>
             <a:ext cx="914400" cy="560070"/>
           </a:xfrm>
           <a:prstGeom prst="rect">
@@ -7923,7 +7842,7 @@
         <p:spPr>
           <a:xfrm>
             <a:off x="5257800" y="4615205"/>
-            <a:ext cx="886097" cy="313639"/>
+            <a:ext cx="2408573" cy="313639"/>
           </a:xfrm>
           <a:prstGeom prst="rect">
             <a:avLst/>
@@ -7944,7 +7863,7 @@
         </p:nvSpPr>
         <p:spPr>
           <a:xfrm>
-            <a:off x="6198761" y="4491990"/>
+            <a:off x="7721237" y="4491990"/>
             <a:ext cx="914400" cy="560070"/>
           </a:xfrm>
           <a:prstGeom prst="rect">
@@ -8015,7 +7934,7 @@
         <p:spPr>
           <a:xfrm>
             <a:off x="5257800" y="5175275"/>
-            <a:ext cx="387667" cy="313639"/>
+            <a:ext cx="1053750" cy="313639"/>
           </a:xfrm>
           <a:prstGeom prst="rect">
             <a:avLst/>
@@ -8036,7 +7955,7 @@
         </p:nvSpPr>
         <p:spPr>
           <a:xfrm>
-            <a:off x="5700331" y="5052060"/>
+            <a:off x="6366414" y="5052060"/>
             <a:ext cx="914400" cy="560070"/>
           </a:xfrm>
           <a:prstGeom prst="rect">
@@ -8107,7 +8026,7 @@
         <p:spPr>
           <a:xfrm>
             <a:off x="5257800" y="5735345"/>
-            <a:ext cx="2011680" cy="313639"/>
+            <a:ext cx="5468112" cy="313639"/>
           </a:xfrm>
           <a:prstGeom prst="rect">
             <a:avLst/>
@@ -8128,7 +8047,7 @@
         </p:nvSpPr>
         <p:spPr>
           <a:xfrm>
-            <a:off x="7324344" y="5612130"/>
+            <a:off x="10780776" y="5612130"/>
             <a:ext cx="914400" cy="560070"/>
           </a:xfrm>
           <a:prstGeom prst="rect">
@@ -8151,138 +8070,6 @@
                 <a:latin typeface="Inter"/>
               </a:rPr>
               <a:t>12+ wk</a:t>
-            </a:r>
-          </a:p>
-        </p:txBody>
-      </p:sp>
-      <p:sp>
-        <p:nvSpPr>
-          <p:cNvPr id="47" name=""/>
-          <p:cNvSpPr/>
-          <p:nvPr/>
-        </p:nvSpPr>
-        <p:spPr>
-          <a:xfrm>
-            <a:off x="8366760" y="1371600"/>
-            <a:ext cx="3273552" cy="4846320"/>
-          </a:xfrm>
-          <a:prstGeom prst="roundRect">
-            <a:avLst>
-              <a:gd name="" fmla="val 6000"/>
-            </a:avLst>
-          </a:prstGeom>
-          <a:solidFill>
-            <a:srgbClr val="FFFFFF"/>
-          </a:solidFill>
-          <a:ln w="9525">
-            <a:solidFill>
-              <a:srgbClr val="E5E0D6"/>
-            </a:solidFill>
-          </a:ln>
-        </p:spPr>
-      </p:sp>
-      <p:sp>
-        <p:nvSpPr>
-          <p:cNvPr id="48" name=""/>
-          <p:cNvSpPr txBox="1"/>
-          <p:nvPr/>
-        </p:nvSpPr>
-        <p:spPr>
-          <a:xfrm>
-            <a:off x="8549640" y="1508760"/>
-            <a:ext cx="2907792" cy="274320"/>
-          </a:xfrm>
-          <a:prstGeom prst="rect">
-            <a:avLst/>
-          </a:prstGeom>
-          <a:noFill/>
-        </p:spPr>
-        <p:txBody>
-          <a:bodyPr wrap="square" lIns="36576" rIns="36576" tIns="18288" bIns="18288" anchor="t">
-            <a:spAutoFit/>
-          </a:bodyPr>
-          <a:lstStyle/>
-          <a:p>
-            <a:pPr algn="l"/>
-            <a:r>
-              <a:rPr sz="1200" b="1">
-                <a:solidFill>
-                  <a:srgbClr val="0F172A"/>
-                </a:solidFill>
-                <a:latin typeface="Space Grotesk"/>
-              </a:rPr>
-              <a:t>Read-out</a:t>
-            </a:r>
-          </a:p>
-        </p:txBody>
-      </p:sp>
-      <p:sp>
-        <p:nvSpPr>
-          <p:cNvPr id="49" name=""/>
-          <p:cNvSpPr txBox="1"/>
-          <p:nvPr/>
-        </p:nvSpPr>
-        <p:spPr>
-          <a:xfrm>
-            <a:off x="8549640" y="1828800"/>
-            <a:ext cx="2907792" cy="4297680"/>
-          </a:xfrm>
-          <a:prstGeom prst="rect">
-            <a:avLst/>
-          </a:prstGeom>
-          <a:noFill/>
-        </p:spPr>
-        <p:txBody>
-          <a:bodyPr wrap="square" lIns="36576" rIns="36576" tIns="18288" bIns="18288" anchor="t">
-            <a:spAutoFit/>
-          </a:bodyPr>
-          <a:lstStyle/>
-          <a:p>
-            <a:pPr algn="l">
-              <a:spcAft>
-                <a:spcPts val="500"/>
-              </a:spcAft>
-            </a:pPr>
-            <a:r>
-              <a:rPr sz="1050" b="0">
-                <a:solidFill>
-                  <a:srgbClr val="334155"/>
-                </a:solidFill>
-                <a:latin typeface="Inter"/>
-              </a:rPr>
-              <a:t>Octaspring Queen: 0 available, 400 inbound, ~100 sold per week. Its 30-day sales were $152,600, so every week out costs real revenue.</a:t>
-            </a:r>
-          </a:p>
-          <a:p>
-            <a:pPr algn="l">
-              <a:spcAft>
-                <a:spcPts val="500"/>
-              </a:spcAft>
-            </a:pPr>
-            <a:r>
-              <a:rPr sz="1050" b="0">
-                <a:solidFill>
-                  <a:srgbClr val="334155"/>
-                </a:solidFill>
-                <a:latin typeface="Inter"/>
-              </a:rPr>
-              <a:t>Octaspring King is next: about 1.6 weeks available at FBA with 227 inbound.</a:t>
-            </a:r>
-          </a:p>
-          <a:p>
-            <a:pPr algn="l">
-              <a:spcAft>
-                <a:spcPts val="500"/>
-              </a:spcAft>
-            </a:pPr>
-            <a:r>
-              <a:rPr sz="1050" b="0">
-                <a:solidFill>
-                  <a:srgbClr val="334155"/>
-                </a:solidFill>
-                <a:latin typeface="Inter"/>
-              </a:rPr>
-              <a:t>Premium Cal King is down to 1 unit.</a:t>
             </a:r>
           </a:p>
         </p:txBody>
@@ -9444,7 +9231,7 @@
         <p:spPr>
           <a:xfrm>
             <a:off x="3429000" y="1371600"/>
-            <a:ext cx="4754880" cy="274320"/>
+            <a:ext cx="8211312" cy="274320"/>
           </a:xfrm>
           <a:prstGeom prst="rect">
             <a:avLst/>
@@ -9514,7 +9301,7 @@
         <p:spPr>
           <a:xfrm>
             <a:off x="5257800" y="1790212"/>
-            <a:ext cx="2011680" cy="250911"/>
+            <a:ext cx="5468112" cy="250911"/>
           </a:xfrm>
           <a:prstGeom prst="rect">
             <a:avLst/>
@@ -9535,7 +9322,7 @@
         </p:nvSpPr>
         <p:spPr>
           <a:xfrm>
-            <a:off x="7324344" y="1691640"/>
+            <a:off x="10780776" y="1691640"/>
             <a:ext cx="914400" cy="448056"/>
           </a:xfrm>
           <a:prstGeom prst="rect">
@@ -9606,7 +9393,7 @@
         <p:spPr>
           <a:xfrm>
             <a:off x="5257800" y="2238268"/>
-            <a:ext cx="750117" cy="250911"/>
+            <a:ext cx="2038957" cy="250911"/>
           </a:xfrm>
           <a:prstGeom prst="rect">
             <a:avLst/>
@@ -9627,7 +9414,7 @@
         </p:nvSpPr>
         <p:spPr>
           <a:xfrm>
-            <a:off x="6062781" y="2139696"/>
+            <a:off x="7351621" y="2139696"/>
             <a:ext cx="914400" cy="448056"/>
           </a:xfrm>
           <a:prstGeom prst="rect">
@@ -9698,7 +9485,7 @@
         <p:spPr>
           <a:xfrm>
             <a:off x="5257800" y="2686324"/>
-            <a:ext cx="409155" cy="250911"/>
+            <a:ext cx="1112158" cy="250911"/>
           </a:xfrm>
           <a:prstGeom prst="rect">
             <a:avLst/>
@@ -9719,7 +9506,7 @@
         </p:nvSpPr>
         <p:spPr>
           <a:xfrm>
-            <a:off x="5721819" y="2587752"/>
+            <a:off x="6424822" y="2587752"/>
             <a:ext cx="914400" cy="448056"/>
           </a:xfrm>
           <a:prstGeom prst="rect">
@@ -9790,7 +9577,7 @@
         <p:spPr>
           <a:xfrm>
             <a:off x="5257800" y="3134380"/>
-            <a:ext cx="187529" cy="250911"/>
+            <a:ext cx="509739" cy="250911"/>
           </a:xfrm>
           <a:prstGeom prst="rect">
             <a:avLst/>
@@ -9811,7 +9598,7 @@
         </p:nvSpPr>
         <p:spPr>
           <a:xfrm>
-            <a:off x="5500193" y="3035808"/>
+            <a:off x="5822403" y="3035808"/>
             <a:ext cx="914400" cy="448056"/>
           </a:xfrm>
           <a:prstGeom prst="rect">
@@ -9882,7 +9669,7 @@
         <p:spPr>
           <a:xfrm>
             <a:off x="5257800" y="3582436"/>
-            <a:ext cx="170481" cy="250911"/>
+            <a:ext cx="463399" cy="250911"/>
           </a:xfrm>
           <a:prstGeom prst="rect">
             <a:avLst/>
@@ -9903,7 +9690,7 @@
         </p:nvSpPr>
         <p:spPr>
           <a:xfrm>
-            <a:off x="5483145" y="3483864"/>
+            <a:off x="5776063" y="3483864"/>
             <a:ext cx="914400" cy="448056"/>
           </a:xfrm>
           <a:prstGeom prst="rect">
@@ -9974,7 +9761,7 @@
         <p:spPr>
           <a:xfrm>
             <a:off x="5257800" y="4030492"/>
-            <a:ext cx="170481" cy="250911"/>
+            <a:ext cx="463399" cy="250911"/>
           </a:xfrm>
           <a:prstGeom prst="rect">
             <a:avLst/>
@@ -9995,7 +9782,7 @@
         </p:nvSpPr>
         <p:spPr>
           <a:xfrm>
-            <a:off x="5483145" y="3931920"/>
+            <a:off x="5776063" y="3931920"/>
             <a:ext cx="914400" cy="448056"/>
           </a:xfrm>
           <a:prstGeom prst="rect">
@@ -10066,7 +9853,7 @@
         <p:spPr>
           <a:xfrm>
             <a:off x="5257800" y="4478548"/>
-            <a:ext cx="153433" cy="250911"/>
+            <a:ext cx="417059" cy="250911"/>
           </a:xfrm>
           <a:prstGeom prst="rect">
             <a:avLst/>
@@ -10087,7 +9874,7 @@
         </p:nvSpPr>
         <p:spPr>
           <a:xfrm>
-            <a:off x="5466097" y="4379976"/>
+            <a:off x="5729723" y="4379976"/>
             <a:ext cx="914400" cy="448056"/>
           </a:xfrm>
           <a:prstGeom prst="rect">
@@ -10158,7 +9945,7 @@
         <p:spPr>
           <a:xfrm>
             <a:off x="5257800" y="4926604"/>
-            <a:ext cx="136385" cy="250911"/>
+            <a:ext cx="370719" cy="250911"/>
           </a:xfrm>
           <a:prstGeom prst="rect">
             <a:avLst/>
@@ -10179,7 +9966,7 @@
         </p:nvSpPr>
         <p:spPr>
           <a:xfrm>
-            <a:off x="5449049" y="4828032"/>
+            <a:off x="5683383" y="4828032"/>
             <a:ext cx="914400" cy="448056"/>
           </a:xfrm>
           <a:prstGeom prst="rect">
@@ -10250,7 +10037,7 @@
         <p:spPr>
           <a:xfrm>
             <a:off x="5257800" y="5374660"/>
-            <a:ext cx="85240" cy="250911"/>
+            <a:ext cx="231699" cy="250911"/>
           </a:xfrm>
           <a:prstGeom prst="rect">
             <a:avLst/>
@@ -10271,7 +10058,7 @@
         </p:nvSpPr>
         <p:spPr>
           <a:xfrm>
-            <a:off x="5397904" y="5276088"/>
+            <a:off x="5544363" y="5276088"/>
             <a:ext cx="914400" cy="448056"/>
           </a:xfrm>
           <a:prstGeom prst="rect">
@@ -10342,7 +10129,7 @@
         <p:spPr>
           <a:xfrm>
             <a:off x="5257800" y="5822716"/>
-            <a:ext cx="85240" cy="250911"/>
+            <a:ext cx="231699" cy="250911"/>
           </a:xfrm>
           <a:prstGeom prst="rect">
             <a:avLst/>
@@ -10363,7 +10150,7 @@
         </p:nvSpPr>
         <p:spPr>
           <a:xfrm>
-            <a:off x="5397904" y="5724144"/>
+            <a:off x="5544363" y="5724144"/>
             <a:ext cx="914400" cy="448056"/>
           </a:xfrm>
           <a:prstGeom prst="rect">
@@ -10386,138 +10173,6 @@
                 <a:latin typeface="Inter"/>
               </a:rPr>
               <a:t>5</a:t>
-            </a:r>
-          </a:p>
-        </p:txBody>
-      </p:sp>
-      <p:sp>
-        <p:nvSpPr>
-          <p:cNvPr id="53" name=""/>
-          <p:cNvSpPr/>
-          <p:nvPr/>
-        </p:nvSpPr>
-        <p:spPr>
-          <a:xfrm>
-            <a:off x="8366760" y="1371600"/>
-            <a:ext cx="3273552" cy="4846320"/>
-          </a:xfrm>
-          <a:prstGeom prst="roundRect">
-            <a:avLst>
-              <a:gd name="" fmla="val 6000"/>
-            </a:avLst>
-          </a:prstGeom>
-          <a:solidFill>
-            <a:srgbClr val="FFFFFF"/>
-          </a:solidFill>
-          <a:ln w="9525">
-            <a:solidFill>
-              <a:srgbClr val="E5E0D6"/>
-            </a:solidFill>
-          </a:ln>
-        </p:spPr>
-      </p:sp>
-      <p:sp>
-        <p:nvSpPr>
-          <p:cNvPr id="54" name=""/>
-          <p:cNvSpPr txBox="1"/>
-          <p:nvPr/>
-        </p:nvSpPr>
-        <p:spPr>
-          <a:xfrm>
-            <a:off x="8549640" y="1508760"/>
-            <a:ext cx="2907792" cy="274320"/>
-          </a:xfrm>
-          <a:prstGeom prst="rect">
-            <a:avLst/>
-          </a:prstGeom>
-          <a:noFill/>
-        </p:spPr>
-        <p:txBody>
-          <a:bodyPr wrap="square" lIns="36576" rIns="36576" tIns="18288" bIns="18288" anchor="t">
-            <a:spAutoFit/>
-          </a:bodyPr>
-          <a:lstStyle/>
-          <a:p>
-            <a:pPr algn="l"/>
-            <a:r>
-              <a:rPr sz="1200" b="1">
-                <a:solidFill>
-                  <a:srgbClr val="0F172A"/>
-                </a:solidFill>
-                <a:latin typeface="Space Grotesk"/>
-              </a:rPr>
-              <a:t>Read-out</a:t>
-            </a:r>
-          </a:p>
-        </p:txBody>
-      </p:sp>
-      <p:sp>
-        <p:nvSpPr>
-          <p:cNvPr id="55" name=""/>
-          <p:cNvSpPr txBox="1"/>
-          <p:nvPr/>
-        </p:nvSpPr>
-        <p:spPr>
-          <a:xfrm>
-            <a:off x="8549640" y="1828800"/>
-            <a:ext cx="2907792" cy="4297680"/>
-          </a:xfrm>
-          <a:prstGeom prst="rect">
-            <a:avLst/>
-          </a:prstGeom>
-          <a:noFill/>
-        </p:spPr>
-        <p:txBody>
-          <a:bodyPr wrap="square" lIns="36576" rIns="36576" tIns="18288" bIns="18288" anchor="t">
-            <a:spAutoFit/>
-          </a:bodyPr>
-          <a:lstStyle/>
-          <a:p>
-            <a:pPr algn="l">
-              <a:spcAft>
-                <a:spcPts val="500"/>
-              </a:spcAft>
-            </a:pPr>
-            <a:r>
-              <a:rPr sz="1050" b="0">
-                <a:solidFill>
-                  <a:srgbClr val="334155"/>
-                </a:solidFill>
-                <a:latin typeface="Inter"/>
-              </a:rPr>
-              <a:t>Most alerts are routine listing changes (images, price, title).</a:t>
-            </a:r>
-          </a:p>
-          <a:p>
-            <a:pPr algn="l">
-              <a:spcAft>
-                <a:spcPts val="500"/>
-              </a:spcAft>
-            </a:pPr>
-            <a:r>
-              <a:rPr sz="1050" b="0">
-                <a:solidFill>
-                  <a:srgbClr val="334155"/>
-                </a:solidFill>
-                <a:latin typeface="Inter"/>
-              </a:rPr>
-              <a:t>Buy Box: lost 10 times and regained 10 times. The latest Buy Box alert (Oct 26) is on the Premium Queen topper, the out-of-stock ASIN.</a:t>
-            </a:r>
-          </a:p>
-          <a:p>
-            <a:pPr algn="l">
-              <a:spcAft>
-                <a:spcPts val="500"/>
-              </a:spcAft>
-            </a:pPr>
-            <a:r>
-              <a:rPr sz="1050" b="0">
-                <a:solidFill>
-                  <a:srgbClr val="334155"/>
-                </a:solidFill>
-                <a:latin typeface="Inter"/>
-              </a:rPr>
-              <a:t>11 inactive and 5 out-of-stock alerts line up with the inventory gaps on the previous slide.</a:t>
             </a:r>
           </a:p>
         </p:txBody>
@@ -25684,7 +25339,7 @@
         </p:nvGraphicFramePr>
         <p:xfrm>
           <a:off x="548640" y="1417320"/>
-          <a:ext cx="6766560" cy="2084832"/>
+          <a:ext cx="11091672" cy="2304288"/>
         </p:xfrm>
         <a:graphic>
           <a:graphicData uri="http://schemas.openxmlformats.org/drawingml/2006/table">
@@ -25693,15 +25348,15 @@
                 <a:tableStyleId>{5C22544A-7EE6-4342-B048-85BDC9FD1C3A}</a:tableStyleId>
               </a:tblPr>
               <a:tblGrid>
-                <a:gridCol w="2651760"/>
-                <a:gridCol w="548640"/>
-                <a:gridCol w="1005840"/>
-                <a:gridCol w="640080"/>
-                <a:gridCol w="640080"/>
-                <a:gridCol w="640080"/>
-                <a:gridCol w="640080"/>
+                <a:gridCol w="4325112"/>
+                <a:gridCol w="914400"/>
+                <a:gridCol w="1463040"/>
+                <a:gridCol w="1097280"/>
+                <a:gridCol w="1097280"/>
+                <a:gridCol w="1097280"/>
+                <a:gridCol w="1097280"/>
               </a:tblGrid>
-              <a:tr h="347472">
+              <a:tr h="384048">
                 <a:tc>
                   <a:txBody>
                     <a:bodyPr wrap="square"/>
@@ -25709,7 +25364,7 @@
                     <a:p>
                       <a:pPr algn="l"/>
                       <a:r>
-                        <a:rPr sz="950" b="1">
+                        <a:rPr sz="1000" b="1">
                           <a:solidFill>
                             <a:srgbClr val="FFFFFF"/>
                           </a:solidFill>
@@ -25732,7 +25387,7 @@
                     <a:p>
                       <a:pPr algn="r"/>
                       <a:r>
-                        <a:rPr sz="950" b="1">
+                        <a:rPr sz="1000" b="1">
                           <a:solidFill>
                             <a:srgbClr val="FFFFFF"/>
                           </a:solidFill>
@@ -25755,7 +25410,7 @@
                     <a:p>
                       <a:pPr algn="r"/>
                       <a:r>
-                        <a:rPr sz="950" b="1">
+                        <a:rPr sz="1000" b="1">
                           <a:solidFill>
                             <a:srgbClr val="FFFFFF"/>
                           </a:solidFill>
@@ -25778,7 +25433,7 @@
                     <a:p>
                       <a:pPr algn="r"/>
                       <a:r>
-                        <a:rPr sz="950" b="1">
+                        <a:rPr sz="1000" b="1">
                           <a:solidFill>
                             <a:srgbClr val="FFFFFF"/>
                           </a:solidFill>
@@ -25801,7 +25456,7 @@
                     <a:p>
                       <a:pPr algn="r"/>
                       <a:r>
-                        <a:rPr sz="950" b="1">
+                        <a:rPr sz="1000" b="1">
                           <a:solidFill>
                             <a:srgbClr val="FFFFFF"/>
                           </a:solidFill>
@@ -25824,7 +25479,7 @@
                     <a:p>
                       <a:pPr algn="r"/>
                       <a:r>
-                        <a:rPr sz="950" b="1">
+                        <a:rPr sz="1000" b="1">
                           <a:solidFill>
                             <a:srgbClr val="FFFFFF"/>
                           </a:solidFill>
@@ -25847,7 +25502,7 @@
                     <a:p>
                       <a:pPr algn="r"/>
                       <a:r>
-                        <a:rPr sz="950" b="1">
+                        <a:rPr sz="1000" b="1">
                           <a:solidFill>
                             <a:srgbClr val="FFFFFF"/>
                           </a:solidFill>
@@ -25864,7 +25519,7 @@
                   </a:tcPr>
                 </a:tc>
               </a:tr>
-              <a:tr h="347472">
+              <a:tr h="384048">
                 <a:tc>
                   <a:txBody>
                     <a:bodyPr wrap="square"/>
@@ -25872,7 +25527,7 @@
                     <a:p>
                       <a:pPr algn="l"/>
                       <a:r>
-                        <a:rPr sz="1050" b="0">
+                        <a:rPr sz="1100" b="0">
                           <a:solidFill>
                             <a:srgbClr val="0F172A"/>
                           </a:solidFill>
@@ -25895,7 +25550,7 @@
                     <a:p>
                       <a:pPr algn="r"/>
                       <a:r>
-                        <a:rPr sz="1050" b="0">
+                        <a:rPr sz="1100" b="0">
                           <a:solidFill>
                             <a:srgbClr val="0F172A"/>
                           </a:solidFill>
@@ -25918,7 +25573,7 @@
                     <a:p>
                       <a:pPr algn="r"/>
                       <a:r>
-                        <a:rPr sz="1050" b="0">
+                        <a:rPr sz="1100" b="0">
                           <a:solidFill>
                             <a:srgbClr val="0F172A"/>
                           </a:solidFill>
@@ -25941,7 +25596,7 @@
                     <a:p>
                       <a:pPr algn="r"/>
                       <a:r>
-                        <a:rPr sz="1050" b="0">
+                        <a:rPr sz="1100" b="0">
                           <a:solidFill>
                             <a:srgbClr val="0F172A"/>
                           </a:solidFill>
@@ -25964,7 +25619,7 @@
                     <a:p>
                       <a:pPr algn="r"/>
                       <a:r>
-                        <a:rPr sz="1050" b="0">
+                        <a:rPr sz="1100" b="0">
                           <a:solidFill>
                             <a:srgbClr val="0F172A"/>
                           </a:solidFill>
@@ -25987,7 +25642,7 @@
                     <a:p>
                       <a:pPr algn="r"/>
                       <a:r>
-                        <a:rPr sz="1050" b="0">
+                        <a:rPr sz="1100" b="0">
                           <a:solidFill>
                             <a:srgbClr val="0F172A"/>
                           </a:solidFill>
@@ -26010,7 +25665,7 @@
                     <a:p>
                       <a:pPr algn="r"/>
                       <a:r>
-                        <a:rPr sz="1050" b="0">
+                        <a:rPr sz="1100" b="0">
                           <a:solidFill>
                             <a:srgbClr val="0F172A"/>
                           </a:solidFill>
@@ -26027,7 +25682,7 @@
                   </a:tcPr>
                 </a:tc>
               </a:tr>
-              <a:tr h="347472">
+              <a:tr h="384048">
                 <a:tc>
                   <a:txBody>
                     <a:bodyPr wrap="square"/>
@@ -26035,7 +25690,7 @@
                     <a:p>
                       <a:pPr algn="l"/>
                       <a:r>
-                        <a:rPr sz="1050" b="0">
+                        <a:rPr sz="1100" b="0">
                           <a:solidFill>
                             <a:srgbClr val="0F172A"/>
                           </a:solidFill>
@@ -26058,7 +25713,7 @@
                     <a:p>
                       <a:pPr algn="r"/>
                       <a:r>
-                        <a:rPr sz="1050" b="0">
+                        <a:rPr sz="1100" b="0">
                           <a:solidFill>
                             <a:srgbClr val="0F172A"/>
                           </a:solidFill>
@@ -26081,7 +25736,7 @@
                     <a:p>
                       <a:pPr algn="r"/>
                       <a:r>
-                        <a:rPr sz="1050" b="0">
+                        <a:rPr sz="1100" b="0">
                           <a:solidFill>
                             <a:srgbClr val="0F172A"/>
                           </a:solidFill>
@@ -26104,7 +25759,7 @@
                     <a:p>
                       <a:pPr algn="r"/>
                       <a:r>
-                        <a:rPr sz="1050" b="0">
+                        <a:rPr sz="1100" b="0">
                           <a:solidFill>
                             <a:srgbClr val="0F172A"/>
                           </a:solidFill>
@@ -26127,7 +25782,7 @@
                     <a:p>
                       <a:pPr algn="r"/>
                       <a:r>
-                        <a:rPr sz="1050" b="0">
+                        <a:rPr sz="1100" b="0">
                           <a:solidFill>
                             <a:srgbClr val="0F172A"/>
                           </a:solidFill>
@@ -26150,7 +25805,7 @@
                     <a:p>
                       <a:pPr algn="r"/>
                       <a:r>
-                        <a:rPr sz="1050" b="0">
+                        <a:rPr sz="1100" b="0">
                           <a:solidFill>
                             <a:srgbClr val="0F172A"/>
                           </a:solidFill>
@@ -26173,7 +25828,7 @@
                     <a:p>
                       <a:pPr algn="r"/>
                       <a:r>
-                        <a:rPr sz="1050" b="0">
+                        <a:rPr sz="1100" b="0">
                           <a:solidFill>
                             <a:srgbClr val="0F172A"/>
                           </a:solidFill>
@@ -26190,7 +25845,7 @@
                   </a:tcPr>
                 </a:tc>
               </a:tr>
-              <a:tr h="347472">
+              <a:tr h="384048">
                 <a:tc>
                   <a:txBody>
                     <a:bodyPr wrap="square"/>
@@ -26198,7 +25853,7 @@
                     <a:p>
                       <a:pPr algn="l"/>
                       <a:r>
-                        <a:rPr sz="1050" b="0">
+                        <a:rPr sz="1100" b="0">
                           <a:solidFill>
                             <a:srgbClr val="0F172A"/>
                           </a:solidFill>
@@ -26221,7 +25876,7 @@
                     <a:p>
                       <a:pPr algn="r"/>
                       <a:r>
-                        <a:rPr sz="1050" b="0">
+                        <a:rPr sz="1100" b="0">
                           <a:solidFill>
                             <a:srgbClr val="0F172A"/>
                           </a:solidFill>
@@ -26244,7 +25899,7 @@
                     <a:p>
                       <a:pPr algn="r"/>
                       <a:r>
-                        <a:rPr sz="1050" b="0">
+                        <a:rPr sz="1100" b="0">
                           <a:solidFill>
                             <a:srgbClr val="0F172A"/>
                           </a:solidFill>
@@ -26267,7 +25922,7 @@
                     <a:p>
                       <a:pPr algn="r"/>
                       <a:r>
-                        <a:rPr sz="1050" b="0">
+                        <a:rPr sz="1100" b="0">
                           <a:solidFill>
                             <a:srgbClr val="0F172A"/>
                           </a:solidFill>
@@ -26290,7 +25945,7 @@
                     <a:p>
                       <a:pPr algn="r"/>
                       <a:r>
-                        <a:rPr sz="1050" b="0">
+                        <a:rPr sz="1100" b="0">
                           <a:solidFill>
                             <a:srgbClr val="0F172A"/>
                           </a:solidFill>
@@ -26313,7 +25968,7 @@
                     <a:p>
                       <a:pPr algn="r"/>
                       <a:r>
-                        <a:rPr sz="1050" b="0">
+                        <a:rPr sz="1100" b="0">
                           <a:solidFill>
                             <a:srgbClr val="0F172A"/>
                           </a:solidFill>
@@ -26336,7 +25991,7 @@
                     <a:p>
                       <a:pPr algn="r"/>
                       <a:r>
-                        <a:rPr sz="1050" b="0">
+                        <a:rPr sz="1100" b="0">
                           <a:solidFill>
                             <a:srgbClr val="0F172A"/>
                           </a:solidFill>
@@ -26353,7 +26008,7 @@
                   </a:tcPr>
                 </a:tc>
               </a:tr>
-              <a:tr h="347472">
+              <a:tr h="384048">
                 <a:tc>
                   <a:txBody>
                     <a:bodyPr wrap="square"/>
@@ -26361,7 +26016,7 @@
                     <a:p>
                       <a:pPr algn="l"/>
                       <a:r>
-                        <a:rPr sz="1050" b="0">
+                        <a:rPr sz="1100" b="0">
                           <a:solidFill>
                             <a:srgbClr val="0F172A"/>
                           </a:solidFill>
@@ -26384,7 +26039,7 @@
                     <a:p>
                       <a:pPr algn="r"/>
                       <a:r>
-                        <a:rPr sz="1050" b="0">
+                        <a:rPr sz="1100" b="0">
                           <a:solidFill>
                             <a:srgbClr val="0F172A"/>
                           </a:solidFill>
@@ -26407,7 +26062,7 @@
                     <a:p>
                       <a:pPr algn="r"/>
                       <a:r>
-                        <a:rPr sz="1050" b="0">
+                        <a:rPr sz="1100" b="0">
                           <a:solidFill>
                             <a:srgbClr val="0F172A"/>
                           </a:solidFill>
@@ -26430,7 +26085,7 @@
                     <a:p>
                       <a:pPr algn="r"/>
                       <a:r>
-                        <a:rPr sz="1050" b="0">
+                        <a:rPr sz="1100" b="0">
                           <a:solidFill>
                             <a:srgbClr val="0F172A"/>
                           </a:solidFill>
@@ -26453,7 +26108,7 @@
                     <a:p>
                       <a:pPr algn="r"/>
                       <a:r>
-                        <a:rPr sz="1050" b="0">
+                        <a:rPr sz="1100" b="0">
                           <a:solidFill>
                             <a:srgbClr val="0F172A"/>
                           </a:solidFill>
@@ -26476,7 +26131,7 @@
                     <a:p>
                       <a:pPr algn="r"/>
                       <a:r>
-                        <a:rPr sz="1050" b="0">
+                        <a:rPr sz="1100" b="0">
                           <a:solidFill>
                             <a:srgbClr val="0F172A"/>
                           </a:solidFill>
@@ -26499,7 +26154,7 @@
                     <a:p>
                       <a:pPr algn="r"/>
                       <a:r>
-                        <a:rPr sz="1050" b="0">
+                        <a:rPr sz="1100" b="0">
                           <a:solidFill>
                             <a:srgbClr val="0F172A"/>
                           </a:solidFill>
@@ -26516,7 +26171,7 @@
                   </a:tcPr>
                 </a:tc>
               </a:tr>
-              <a:tr h="347472">
+              <a:tr h="384048">
                 <a:tc>
                   <a:txBody>
                     <a:bodyPr wrap="square"/>
@@ -26524,7 +26179,7 @@
                     <a:p>
                       <a:pPr algn="l"/>
                       <a:r>
-                        <a:rPr sz="1050" b="0">
+                        <a:rPr sz="1100" b="0">
                           <a:solidFill>
                             <a:srgbClr val="0F172A"/>
                           </a:solidFill>
@@ -26547,7 +26202,7 @@
                     <a:p>
                       <a:pPr algn="r"/>
                       <a:r>
-                        <a:rPr sz="1050" b="0">
+                        <a:rPr sz="1100" b="0">
                           <a:solidFill>
                             <a:srgbClr val="0F172A"/>
                           </a:solidFill>
@@ -26570,7 +26225,7 @@
                     <a:p>
                       <a:pPr algn="r"/>
                       <a:r>
-                        <a:rPr sz="1050" b="0">
+                        <a:rPr sz="1100" b="0">
                           <a:solidFill>
                             <a:srgbClr val="0F172A"/>
                           </a:solidFill>
@@ -26593,7 +26248,7 @@
                     <a:p>
                       <a:pPr algn="r"/>
                       <a:r>
-                        <a:rPr sz="1050" b="0">
+                        <a:rPr sz="1100" b="0">
                           <a:solidFill>
                             <a:srgbClr val="0F172A"/>
                           </a:solidFill>
@@ -26616,7 +26271,7 @@
                     <a:p>
                       <a:pPr algn="r"/>
                       <a:r>
-                        <a:rPr sz="1050" b="0">
+                        <a:rPr sz="1100" b="0">
                           <a:solidFill>
                             <a:srgbClr val="0F172A"/>
                           </a:solidFill>
@@ -26639,7 +26294,7 @@
                     <a:p>
                       <a:pPr algn="r"/>
                       <a:r>
-                        <a:rPr sz="1050" b="0">
+                        <a:rPr sz="1100" b="0">
                           <a:solidFill>
                             <a:srgbClr val="0F172A"/>
                           </a:solidFill>
@@ -26662,7 +26317,7 @@
                     <a:p>
                       <a:pPr algn="r"/>
                       <a:r>
-                        <a:rPr sz="1050" b="0">
+                        <a:rPr sz="1100" b="0">
                           <a:solidFill>
                             <a:srgbClr val="0F172A"/>
                           </a:solidFill>
@@ -26686,161 +26341,13 @@
       <p:sp>
         <p:nvSpPr>
           <p:cNvPr id="11" name=""/>
-          <p:cNvSpPr/>
-          <p:nvPr/>
-        </p:nvSpPr>
-        <p:spPr>
-          <a:xfrm>
-            <a:off x="7543800" y="1417320"/>
-            <a:ext cx="4096512" cy="4800600"/>
-          </a:xfrm>
-          <a:prstGeom prst="roundRect">
-            <a:avLst>
-              <a:gd name="" fmla="val 6000"/>
-            </a:avLst>
-          </a:prstGeom>
-          <a:solidFill>
-            <a:srgbClr val="FFFFFF"/>
-          </a:solidFill>
-          <a:ln w="9525">
-            <a:solidFill>
-              <a:srgbClr val="E5E0D6"/>
-            </a:solidFill>
-          </a:ln>
-        </p:spPr>
-      </p:sp>
-      <p:sp>
-        <p:nvSpPr>
-          <p:cNvPr id="12" name=""/>
-          <p:cNvSpPr txBox="1"/>
-          <p:nvPr/>
-        </p:nvSpPr>
-        <p:spPr>
-          <a:xfrm>
-            <a:off x="7726679" y="1554480"/>
-            <a:ext cx="3730752" cy="274320"/>
-          </a:xfrm>
-          <a:prstGeom prst="rect">
-            <a:avLst/>
-          </a:prstGeom>
-          <a:noFill/>
-        </p:spPr>
-        <p:txBody>
-          <a:bodyPr wrap="square" lIns="36576" rIns="36576" tIns="18288" bIns="18288" anchor="t">
-            <a:spAutoFit/>
-          </a:bodyPr>
-          <a:lstStyle/>
-          <a:p>
-            <a:pPr algn="l"/>
-            <a:r>
-              <a:rPr sz="1200" b="1">
-                <a:solidFill>
-                  <a:srgbClr val="0F172A"/>
-                </a:solidFill>
-                <a:latin typeface="Space Grotesk"/>
-              </a:rPr>
-              <a:t>Read-out</a:t>
-            </a:r>
-          </a:p>
-        </p:txBody>
-      </p:sp>
-      <p:sp>
-        <p:nvSpPr>
-          <p:cNvPr id="13" name=""/>
-          <p:cNvSpPr txBox="1"/>
-          <p:nvPr/>
-        </p:nvSpPr>
-        <p:spPr>
-          <a:xfrm>
-            <a:off x="7726679" y="1874519"/>
-            <a:ext cx="3730752" cy="4251960"/>
-          </a:xfrm>
-          <a:prstGeom prst="rect">
-            <a:avLst/>
-          </a:prstGeom>
-          <a:noFill/>
-        </p:spPr>
-        <p:txBody>
-          <a:bodyPr wrap="square" lIns="36576" rIns="36576" tIns="18288" bIns="18288" anchor="t">
-            <a:spAutoFit/>
-          </a:bodyPr>
-          <a:lstStyle/>
-          <a:p>
-            <a:pPr algn="l">
-              <a:spcAft>
-                <a:spcPts val="500"/>
-              </a:spcAft>
-            </a:pPr>
-            <a:r>
-              <a:rPr sz="1050" b="0">
-                <a:solidFill>
-                  <a:srgbClr val="334155"/>
-                </a:solidFill>
-                <a:latin typeface="Inter"/>
-              </a:rPr>
-              <a:t>Non-branded searches are the expensive side of the account: category keywords ran at 39.7% ACoS this week vs 16.7% for branded.</a:t>
-            </a:r>
-          </a:p>
-          <a:p>
-            <a:pPr algn="l">
-              <a:spcAft>
-                <a:spcPts val="500"/>
-              </a:spcAft>
-            </a:pPr>
-            <a:r>
-              <a:rPr sz="1050" b="0">
-                <a:solidFill>
-                  <a:srgbClr val="334155"/>
-                </a:solidFill>
-                <a:latin typeface="Inter"/>
-              </a:rPr>
-              <a:t>The generic “mattress +topper” phrase target alone spent $1,191 for 4 orders (73.6% ACoS).</a:t>
-            </a:r>
-          </a:p>
-          <a:p>
-            <a:pPr algn="l">
-              <a:spcAft>
-                <a:spcPts val="500"/>
-              </a:spcAft>
-            </a:pPr>
-            <a:r>
-              <a:rPr sz="1050" b="0">
-                <a:solidFill>
-                  <a:srgbClr val="334155"/>
-                </a:solidFill>
-                <a:latin typeface="Inter"/>
-              </a:rPr>
-              <a:t>The searches that did convert are size-specific (“bed toppers queen size”, “split king”, “short king”). Move budget toward size-specific exact keywords and away from the broad generic phrase.</a:t>
-            </a:r>
-          </a:p>
-          <a:p>
-            <a:pPr algn="l">
-              <a:spcAft>
-                <a:spcPts val="500"/>
-              </a:spcAft>
-            </a:pPr>
-            <a:r>
-              <a:rPr sz="1050" b="0">
-                <a:solidFill>
-                  <a:srgbClr val="334155"/>
-                </a:solidFill>
-                <a:latin typeface="Inter"/>
-              </a:rPr>
-              <a:t>3 converting searches are ready to add as exact keywords; 19 are candidates for negatives.</a:t>
-            </a:r>
-          </a:p>
-        </p:txBody>
-      </p:sp>
-      <p:sp>
-        <p:nvSpPr>
-          <p:cNvPr id="14" name=""/>
-          <p:cNvSpPr txBox="1"/>
-          <p:nvPr/>
-        </p:nvSpPr>
-        <p:spPr>
-          <a:xfrm>
-            <a:off x="548640" y="3593592"/>
-            <a:ext cx="6766560" cy="457200"/>
+          <p:cNvSpPr txBox="1"/>
+          <p:nvPr/>
+        </p:nvSpPr>
+        <p:spPr>
+          <a:xfrm>
+            <a:off x="548640" y="3858768"/>
+            <a:ext cx="11091672" cy="457200"/>
           </a:xfrm>
           <a:prstGeom prst="rect">
             <a:avLst/>

--- a/dormeo-us/deck/2026-10-24/Dormeo-US-Weekly-Business-Review-Week-43-2026-10-24.pptx
+++ b/dormeo-us/deck/2026-10-24/Dormeo-US-Weekly-Business-Review-Week-43-2026-10-24.pptx
@@ -7005,7 +7005,7 @@
                 </a:solidFill>
                 <a:latin typeface="Space Grotesk"/>
               </a:rPr>
-              <a:t>2</a:t>
+              <a:t>4</a:t>
             </a:r>
           </a:p>
         </p:txBody>
@@ -7040,7 +7040,7 @@
                 </a:solidFill>
                 <a:latin typeface="Inter"/>
               </a:rPr>
-              <a:t>selling ASINs at 0 units</a:t>
+              <a:t>of 19 selling SKUs, 0 at FBA</a:t>
             </a:r>
           </a:p>
         </p:txBody>
@@ -7134,7 +7134,7 @@
                 </a:solidFill>
                 <a:latin typeface="Space Grotesk"/>
               </a:rPr>
-              <a:t>6</a:t>
+              <a:t>2</a:t>
             </a:r>
           </a:p>
         </p:txBody>
@@ -7169,7 +7169,7 @@
                 </a:solidFill>
                 <a:latin typeface="Inter"/>
               </a:rPr>
-              <a:t>under ~30 days of supply</a:t>
+              <a:t>4 weeks of stock or less</a:t>
             </a:r>
           </a:p>
         </p:txBody>
@@ -7228,7 +7228,7 @@
                 </a:solidFill>
                 <a:latin typeface="Inter"/>
               </a:rPr>
-              <a:t>FLAGGED BY SELLERISE</a:t>
+              <a:t>UNITS INBOUND</a:t>
             </a:r>
           </a:p>
         </p:txBody>
@@ -7263,7 +7263,7 @@
                 </a:solidFill>
                 <a:latin typeface="Space Grotesk"/>
               </a:rPr>
-              <a:t>27</a:t>
+              <a:t>938</a:t>
             </a:r>
           </a:p>
         </p:txBody>
@@ -7298,7 +7298,7 @@
                 </a:solidFill>
                 <a:latin typeface="Inter"/>
               </a:rPr>
-              <a:t>ASINs with an inventory risk</a:t>
+              <a:t>on the way to FBA</a:t>
             </a:r>
           </a:p>
         </p:txBody>

--- a/dormeo-us/deck/2026-10-24/Dormeo-US-Weekly-Business-Review-Week-43-2026-10-24.pptx
+++ b/dormeo-us/deck/2026-10-24/Dormeo-US-Weekly-Business-Review-Week-43-2026-10-24.pptx
@@ -723,14 +723,14 @@
   <p:cSld>
     <p:spTree>
       <p:nvGrpSpPr>
-        <p:cNvPr id="1" name=""/>
+        <p:cNvPr id="1" name="Shape 1"/>
         <p:cNvGrpSpPr/>
         <p:nvPr/>
       </p:nvGrpSpPr>
       <p:grpSpPr/>
       <p:sp>
         <p:nvSpPr>
-          <p:cNvPr id="2" name=""/>
+          <p:cNvPr id="2" name="Shape 2"/>
           <p:cNvSpPr/>
           <p:nvPr/>
         </p:nvSpPr>
@@ -752,7 +752,7 @@
       </p:sp>
       <p:sp>
         <p:nvSpPr>
-          <p:cNvPr id="3" name=""/>
+          <p:cNvPr id="3" name="Shape 3"/>
           <p:cNvSpPr/>
           <p:nvPr/>
         </p:nvSpPr>
@@ -774,7 +774,7 @@
       </p:sp>
       <p:pic>
         <p:nvPicPr>
-          <p:cNvPr id="4" name="" descr="logo_dark_s.png"/>
+          <p:cNvPr id="4" name="Shape 4" descr="logo_dark_s.png"/>
           <p:cNvPicPr>
             <a:picLocks noChangeAspect="1"/>
           </p:cNvPicPr>
@@ -798,7 +798,7 @@
       </p:pic>
       <p:sp>
         <p:nvSpPr>
-          <p:cNvPr id="5" name=""/>
+          <p:cNvPr id="5" name="Shape 5"/>
           <p:cNvSpPr txBox="1"/>
           <p:nvPr/>
         </p:nvSpPr>
@@ -833,7 +833,7 @@
       </p:sp>
       <p:sp>
         <p:nvSpPr>
-          <p:cNvPr id="6" name=""/>
+          <p:cNvPr id="6" name="Shape 6"/>
           <p:cNvSpPr txBox="1"/>
           <p:nvPr/>
         </p:nvSpPr>
@@ -868,7 +868,7 @@
       </p:sp>
       <p:sp>
         <p:nvSpPr>
-          <p:cNvPr id="7" name=""/>
+          <p:cNvPr id="7" name="Shape 7"/>
           <p:cNvSpPr txBox="1"/>
           <p:nvPr/>
         </p:nvSpPr>
@@ -903,7 +903,7 @@
       </p:sp>
       <p:sp>
         <p:nvSpPr>
-          <p:cNvPr id="8" name=""/>
+          <p:cNvPr id="8" name="Shape 8"/>
           <p:cNvSpPr txBox="1"/>
           <p:nvPr/>
         </p:nvSpPr>
@@ -949,14 +949,14 @@
   <p:cSld>
     <p:spTree>
       <p:nvGrpSpPr>
-        <p:cNvPr id="1" name=""/>
+        <p:cNvPr id="1" name="Shape 1"/>
         <p:cNvGrpSpPr/>
         <p:nvPr/>
       </p:nvGrpSpPr>
       <p:grpSpPr/>
       <p:sp>
         <p:nvSpPr>
-          <p:cNvPr id="2" name=""/>
+          <p:cNvPr id="2" name="Shape 2"/>
           <p:cNvSpPr/>
           <p:nvPr/>
         </p:nvSpPr>
@@ -978,7 +978,7 @@
       </p:sp>
       <p:sp>
         <p:nvSpPr>
-          <p:cNvPr id="3" name=""/>
+          <p:cNvPr id="3" name="Shape 3"/>
           <p:cNvSpPr/>
           <p:nvPr/>
         </p:nvSpPr>
@@ -1000,7 +1000,7 @@
       </p:sp>
       <p:sp>
         <p:nvSpPr>
-          <p:cNvPr id="4" name=""/>
+          <p:cNvPr id="4" name="Shape 4"/>
           <p:cNvSpPr txBox="1"/>
           <p:nvPr/>
         </p:nvSpPr>
@@ -1035,7 +1035,7 @@
       </p:sp>
       <p:sp>
         <p:nvSpPr>
-          <p:cNvPr id="5" name=""/>
+          <p:cNvPr id="5" name="Shape 5"/>
           <p:cNvSpPr txBox="1"/>
           <p:nvPr/>
         </p:nvSpPr>
@@ -1070,7 +1070,7 @@
       </p:sp>
       <p:pic>
         <p:nvPicPr>
-          <p:cNvPr id="6" name="" descr="logo_s.png"/>
+          <p:cNvPr id="6" name="Shape 6" descr="logo_s.png"/>
           <p:cNvPicPr>
             <a:picLocks noChangeAspect="1"/>
           </p:cNvPicPr>
@@ -1094,7 +1094,7 @@
       </p:pic>
       <p:sp>
         <p:nvSpPr>
-          <p:cNvPr id="7" name=""/>
+          <p:cNvPr id="7" name="Shape 7"/>
           <p:cNvSpPr/>
           <p:nvPr/>
         </p:nvSpPr>
@@ -1116,7 +1116,7 @@
       </p:sp>
       <p:sp>
         <p:nvSpPr>
-          <p:cNvPr id="8" name=""/>
+          <p:cNvPr id="8" name="Shape 8"/>
           <p:cNvSpPr txBox="1"/>
           <p:nvPr/>
         </p:nvSpPr>
@@ -1151,7 +1151,7 @@
       </p:sp>
       <p:sp>
         <p:nvSpPr>
-          <p:cNvPr id="9" name=""/>
+          <p:cNvPr id="9" name="Shape 9"/>
           <p:cNvSpPr txBox="1"/>
           <p:nvPr/>
         </p:nvSpPr>
@@ -1186,7 +1186,7 @@
       </p:sp>
       <p:graphicFrame>
         <p:nvGraphicFramePr>
-          <p:cNvPr id="10" name=""/>
+          <p:cNvPr id="10" name="Shape 10"/>
           <p:cNvGraphicFramePr>
             <a:graphicFrameLocks noGrp="1"/>
           </p:cNvGraphicFramePr>
@@ -5948,7 +5948,7 @@
       </p:graphicFrame>
       <p:sp>
         <p:nvSpPr>
-          <p:cNvPr id="11" name=""/>
+          <p:cNvPr id="11" name="Shape 11"/>
           <p:cNvSpPr txBox="1"/>
           <p:nvPr/>
         </p:nvSpPr>
@@ -5994,14 +5994,14 @@
   <p:cSld>
     <p:spTree>
       <p:nvGrpSpPr>
-        <p:cNvPr id="1" name=""/>
+        <p:cNvPr id="1" name="Shape 1"/>
         <p:cNvGrpSpPr/>
         <p:nvPr/>
       </p:nvGrpSpPr>
       <p:grpSpPr/>
       <p:sp>
         <p:nvSpPr>
-          <p:cNvPr id="2" name=""/>
+          <p:cNvPr id="2" name="Shape 2"/>
           <p:cNvSpPr/>
           <p:nvPr/>
         </p:nvSpPr>
@@ -6023,7 +6023,7 @@
       </p:sp>
       <p:sp>
         <p:nvSpPr>
-          <p:cNvPr id="3" name=""/>
+          <p:cNvPr id="3" name="Shape 3"/>
           <p:cNvSpPr/>
           <p:nvPr/>
         </p:nvSpPr>
@@ -6045,7 +6045,7 @@
       </p:sp>
       <p:sp>
         <p:nvSpPr>
-          <p:cNvPr id="4" name=""/>
+          <p:cNvPr id="4" name="Shape 4"/>
           <p:cNvSpPr txBox="1"/>
           <p:nvPr/>
         </p:nvSpPr>
@@ -6080,7 +6080,7 @@
       </p:sp>
       <p:sp>
         <p:nvSpPr>
-          <p:cNvPr id="5" name=""/>
+          <p:cNvPr id="5" name="Shape 5"/>
           <p:cNvSpPr txBox="1"/>
           <p:nvPr/>
         </p:nvSpPr>
@@ -6115,7 +6115,7 @@
       </p:sp>
       <p:pic>
         <p:nvPicPr>
-          <p:cNvPr id="6" name="" descr="logo_s.png"/>
+          <p:cNvPr id="6" name="Shape 6" descr="logo_s.png"/>
           <p:cNvPicPr>
             <a:picLocks noChangeAspect="1"/>
           </p:cNvPicPr>
@@ -6139,7 +6139,7 @@
       </p:pic>
       <p:sp>
         <p:nvSpPr>
-          <p:cNvPr id="7" name=""/>
+          <p:cNvPr id="7" name="Shape 7"/>
           <p:cNvSpPr/>
           <p:nvPr/>
         </p:nvSpPr>
@@ -6161,7 +6161,7 @@
       </p:sp>
       <p:sp>
         <p:nvSpPr>
-          <p:cNvPr id="8" name=""/>
+          <p:cNvPr id="8" name="Shape 8"/>
           <p:cNvSpPr txBox="1"/>
           <p:nvPr/>
         </p:nvSpPr>
@@ -6196,7 +6196,7 @@
       </p:sp>
       <p:sp>
         <p:nvSpPr>
-          <p:cNvPr id="9" name=""/>
+          <p:cNvPr id="9" name="Shape 9"/>
           <p:cNvSpPr txBox="1"/>
           <p:nvPr/>
         </p:nvSpPr>
@@ -6231,7 +6231,7 @@
       </p:sp>
       <p:sp>
         <p:nvSpPr>
-          <p:cNvPr id="10" name=""/>
+          <p:cNvPr id="10" name="Shape 10"/>
           <p:cNvSpPr/>
           <p:nvPr/>
         </p:nvSpPr>
@@ -6255,7 +6255,7 @@
       </p:sp>
       <p:sp>
         <p:nvSpPr>
-          <p:cNvPr id="11" name=""/>
+          <p:cNvPr id="11" name="Shape 11"/>
           <p:cNvSpPr txBox="1"/>
           <p:nvPr/>
         </p:nvSpPr>
@@ -6290,7 +6290,7 @@
       </p:sp>
       <p:sp>
         <p:nvSpPr>
-          <p:cNvPr id="12" name=""/>
+          <p:cNvPr id="12" name="Shape 12"/>
           <p:cNvSpPr/>
           <p:nvPr/>
         </p:nvSpPr>
@@ -6316,7 +6316,7 @@
       </p:sp>
       <p:sp>
         <p:nvSpPr>
-          <p:cNvPr id="13" name=""/>
+          <p:cNvPr id="13" name="Shape 13"/>
           <p:cNvSpPr txBox="1"/>
           <p:nvPr/>
         </p:nvSpPr>
@@ -6351,7 +6351,7 @@
       </p:sp>
       <p:sp>
         <p:nvSpPr>
-          <p:cNvPr id="14" name=""/>
+          <p:cNvPr id="14" name="Shape 14"/>
           <p:cNvSpPr txBox="1"/>
           <p:nvPr/>
         </p:nvSpPr>
@@ -6422,7 +6422,7 @@
       </p:sp>
       <p:sp>
         <p:nvSpPr>
-          <p:cNvPr id="15" name=""/>
+          <p:cNvPr id="15" name="Shape 15"/>
           <p:cNvSpPr/>
           <p:nvPr/>
         </p:nvSpPr>
@@ -6448,7 +6448,7 @@
       </p:sp>
       <p:sp>
         <p:nvSpPr>
-          <p:cNvPr id="16" name=""/>
+          <p:cNvPr id="16" name="Shape 16"/>
           <p:cNvSpPr txBox="1"/>
           <p:nvPr/>
         </p:nvSpPr>
@@ -6483,7 +6483,7 @@
       </p:sp>
       <p:sp>
         <p:nvSpPr>
-          <p:cNvPr id="17" name=""/>
+          <p:cNvPr id="17" name="Shape 17"/>
           <p:cNvSpPr txBox="1"/>
           <p:nvPr/>
         </p:nvSpPr>
@@ -6538,7 +6538,7 @@
       </p:sp>
       <p:sp>
         <p:nvSpPr>
-          <p:cNvPr id="18" name=""/>
+          <p:cNvPr id="18" name="Shape 18"/>
           <p:cNvSpPr/>
           <p:nvPr/>
         </p:nvSpPr>
@@ -6564,7 +6564,7 @@
       </p:sp>
       <p:sp>
         <p:nvSpPr>
-          <p:cNvPr id="19" name=""/>
+          <p:cNvPr id="19" name="Shape 19"/>
           <p:cNvSpPr txBox="1"/>
           <p:nvPr/>
         </p:nvSpPr>
@@ -6599,7 +6599,7 @@
       </p:sp>
       <p:sp>
         <p:nvSpPr>
-          <p:cNvPr id="20" name=""/>
+          <p:cNvPr id="20" name="Shape 20"/>
           <p:cNvSpPr txBox="1"/>
           <p:nvPr/>
         </p:nvSpPr>
@@ -6681,14 +6681,14 @@
   <p:cSld>
     <p:spTree>
       <p:nvGrpSpPr>
-        <p:cNvPr id="1" name=""/>
+        <p:cNvPr id="1" name="Shape 1"/>
         <p:cNvGrpSpPr/>
         <p:nvPr/>
       </p:nvGrpSpPr>
       <p:grpSpPr/>
       <p:sp>
         <p:nvSpPr>
-          <p:cNvPr id="2" name=""/>
+          <p:cNvPr id="2" name="Shape 2"/>
           <p:cNvSpPr/>
           <p:nvPr/>
         </p:nvSpPr>
@@ -6710,7 +6710,7 @@
       </p:sp>
       <p:sp>
         <p:nvSpPr>
-          <p:cNvPr id="3" name=""/>
+          <p:cNvPr id="3" name="Shape 3"/>
           <p:cNvSpPr/>
           <p:nvPr/>
         </p:nvSpPr>
@@ -6732,7 +6732,7 @@
       </p:sp>
       <p:sp>
         <p:nvSpPr>
-          <p:cNvPr id="4" name=""/>
+          <p:cNvPr id="4" name="Shape 4"/>
           <p:cNvSpPr txBox="1"/>
           <p:nvPr/>
         </p:nvSpPr>
@@ -6767,7 +6767,7 @@
       </p:sp>
       <p:sp>
         <p:nvSpPr>
-          <p:cNvPr id="5" name=""/>
+          <p:cNvPr id="5" name="Shape 5"/>
           <p:cNvSpPr txBox="1"/>
           <p:nvPr/>
         </p:nvSpPr>
@@ -6802,7 +6802,7 @@
       </p:sp>
       <p:pic>
         <p:nvPicPr>
-          <p:cNvPr id="6" name="" descr="logo_s.png"/>
+          <p:cNvPr id="6" name="Shape 6" descr="logo_s.png"/>
           <p:cNvPicPr>
             <a:picLocks noChangeAspect="1"/>
           </p:cNvPicPr>
@@ -6826,7 +6826,7 @@
       </p:pic>
       <p:sp>
         <p:nvSpPr>
-          <p:cNvPr id="7" name=""/>
+          <p:cNvPr id="7" name="Shape 7"/>
           <p:cNvSpPr/>
           <p:nvPr/>
         </p:nvSpPr>
@@ -6848,7 +6848,7 @@
       </p:sp>
       <p:sp>
         <p:nvSpPr>
-          <p:cNvPr id="8" name=""/>
+          <p:cNvPr id="8" name="Shape 8"/>
           <p:cNvSpPr txBox="1"/>
           <p:nvPr/>
         </p:nvSpPr>
@@ -6883,7 +6883,7 @@
       </p:sp>
       <p:sp>
         <p:nvSpPr>
-          <p:cNvPr id="9" name=""/>
+          <p:cNvPr id="9" name="Shape 9"/>
           <p:cNvSpPr txBox="1"/>
           <p:nvPr/>
         </p:nvSpPr>
@@ -6918,7 +6918,7 @@
       </p:sp>
       <p:sp>
         <p:nvSpPr>
-          <p:cNvPr id="10" name=""/>
+          <p:cNvPr id="10" name="Shape 10"/>
           <p:cNvSpPr/>
           <p:nvPr/>
         </p:nvSpPr>
@@ -6942,7 +6942,7 @@
       </p:sp>
       <p:sp>
         <p:nvSpPr>
-          <p:cNvPr id="11" name=""/>
+          <p:cNvPr id="11" name="Shape 11"/>
           <p:cNvSpPr txBox="1"/>
           <p:nvPr/>
         </p:nvSpPr>
@@ -6977,7 +6977,7 @@
       </p:sp>
       <p:sp>
         <p:nvSpPr>
-          <p:cNvPr id="12" name=""/>
+          <p:cNvPr id="12" name="Shape 12"/>
           <p:cNvSpPr txBox="1"/>
           <p:nvPr/>
         </p:nvSpPr>
@@ -7012,7 +7012,7 @@
       </p:sp>
       <p:sp>
         <p:nvSpPr>
-          <p:cNvPr id="13" name=""/>
+          <p:cNvPr id="13" name="Shape 13"/>
           <p:cNvSpPr txBox="1"/>
           <p:nvPr/>
         </p:nvSpPr>
@@ -7047,7 +7047,7 @@
       </p:sp>
       <p:sp>
         <p:nvSpPr>
-          <p:cNvPr id="14" name=""/>
+          <p:cNvPr id="14" name="Shape 14"/>
           <p:cNvSpPr/>
           <p:nvPr/>
         </p:nvSpPr>
@@ -7071,7 +7071,7 @@
       </p:sp>
       <p:sp>
         <p:nvSpPr>
-          <p:cNvPr id="15" name=""/>
+          <p:cNvPr id="15" name="Shape 15"/>
           <p:cNvSpPr txBox="1"/>
           <p:nvPr/>
         </p:nvSpPr>
@@ -7106,7 +7106,7 @@
       </p:sp>
       <p:sp>
         <p:nvSpPr>
-          <p:cNvPr id="16" name=""/>
+          <p:cNvPr id="16" name="Shape 16"/>
           <p:cNvSpPr txBox="1"/>
           <p:nvPr/>
         </p:nvSpPr>
@@ -7141,7 +7141,7 @@
       </p:sp>
       <p:sp>
         <p:nvSpPr>
-          <p:cNvPr id="17" name=""/>
+          <p:cNvPr id="17" name="Shape 17"/>
           <p:cNvSpPr txBox="1"/>
           <p:nvPr/>
         </p:nvSpPr>
@@ -7176,7 +7176,7 @@
       </p:sp>
       <p:sp>
         <p:nvSpPr>
-          <p:cNvPr id="18" name=""/>
+          <p:cNvPr id="18" name="Shape 18"/>
           <p:cNvSpPr/>
           <p:nvPr/>
         </p:nvSpPr>
@@ -7200,7 +7200,7 @@
       </p:sp>
       <p:sp>
         <p:nvSpPr>
-          <p:cNvPr id="19" name=""/>
+          <p:cNvPr id="19" name="Shape 19"/>
           <p:cNvSpPr txBox="1"/>
           <p:nvPr/>
         </p:nvSpPr>
@@ -7235,7 +7235,7 @@
       </p:sp>
       <p:sp>
         <p:nvSpPr>
-          <p:cNvPr id="20" name=""/>
+          <p:cNvPr id="20" name="Shape 20"/>
           <p:cNvSpPr txBox="1"/>
           <p:nvPr/>
         </p:nvSpPr>
@@ -7270,7 +7270,7 @@
       </p:sp>
       <p:sp>
         <p:nvSpPr>
-          <p:cNvPr id="21" name=""/>
+          <p:cNvPr id="21" name="Shape 21"/>
           <p:cNvSpPr txBox="1"/>
           <p:nvPr/>
         </p:nvSpPr>
@@ -7305,7 +7305,7 @@
       </p:sp>
       <p:sp>
         <p:nvSpPr>
-          <p:cNvPr id="22" name=""/>
+          <p:cNvPr id="22" name="Shape 22"/>
           <p:cNvSpPr txBox="1"/>
           <p:nvPr/>
         </p:nvSpPr>
@@ -7340,7 +7340,7 @@
       </p:sp>
       <p:sp>
         <p:nvSpPr>
-          <p:cNvPr id="23" name=""/>
+          <p:cNvPr id="23" name="Shape 23"/>
           <p:cNvSpPr txBox="1"/>
           <p:nvPr/>
         </p:nvSpPr>
@@ -7375,7 +7375,7 @@
       </p:sp>
       <p:sp>
         <p:nvSpPr>
-          <p:cNvPr id="24" name=""/>
+          <p:cNvPr id="24" name="Shape 24"/>
           <p:cNvSpPr/>
           <p:nvPr/>
         </p:nvSpPr>
@@ -7397,7 +7397,7 @@
       </p:sp>
       <p:sp>
         <p:nvSpPr>
-          <p:cNvPr id="25" name=""/>
+          <p:cNvPr id="25" name="Shape 25"/>
           <p:cNvSpPr txBox="1"/>
           <p:nvPr/>
         </p:nvSpPr>
@@ -7432,7 +7432,7 @@
       </p:sp>
       <p:sp>
         <p:nvSpPr>
-          <p:cNvPr id="26" name=""/>
+          <p:cNvPr id="26" name="Shape 26"/>
           <p:cNvSpPr txBox="1"/>
           <p:nvPr/>
         </p:nvSpPr>
@@ -7467,7 +7467,7 @@
       </p:sp>
       <p:sp>
         <p:nvSpPr>
-          <p:cNvPr id="27" name=""/>
+          <p:cNvPr id="27" name="Shape 27"/>
           <p:cNvSpPr/>
           <p:nvPr/>
         </p:nvSpPr>
@@ -7489,7 +7489,7 @@
       </p:sp>
       <p:sp>
         <p:nvSpPr>
-          <p:cNvPr id="28" name=""/>
+          <p:cNvPr id="28" name="Shape 28"/>
           <p:cNvSpPr txBox="1"/>
           <p:nvPr/>
         </p:nvSpPr>
@@ -7524,7 +7524,7 @@
       </p:sp>
       <p:sp>
         <p:nvSpPr>
-          <p:cNvPr id="29" name=""/>
+          <p:cNvPr id="29" name="Shape 29"/>
           <p:cNvSpPr txBox="1"/>
           <p:nvPr/>
         </p:nvSpPr>
@@ -7559,7 +7559,7 @@
       </p:sp>
       <p:sp>
         <p:nvSpPr>
-          <p:cNvPr id="30" name=""/>
+          <p:cNvPr id="30" name="Shape 30"/>
           <p:cNvSpPr/>
           <p:nvPr/>
         </p:nvSpPr>
@@ -7581,7 +7581,7 @@
       </p:sp>
       <p:sp>
         <p:nvSpPr>
-          <p:cNvPr id="31" name=""/>
+          <p:cNvPr id="31" name="Shape 31"/>
           <p:cNvSpPr txBox="1"/>
           <p:nvPr/>
         </p:nvSpPr>
@@ -7616,7 +7616,7 @@
       </p:sp>
       <p:sp>
         <p:nvSpPr>
-          <p:cNvPr id="32" name=""/>
+          <p:cNvPr id="32" name="Shape 32"/>
           <p:cNvSpPr txBox="1"/>
           <p:nvPr/>
         </p:nvSpPr>
@@ -7651,7 +7651,7 @@
       </p:sp>
       <p:sp>
         <p:nvSpPr>
-          <p:cNvPr id="33" name=""/>
+          <p:cNvPr id="33" name="Shape 33"/>
           <p:cNvSpPr/>
           <p:nvPr/>
         </p:nvSpPr>
@@ -7673,7 +7673,7 @@
       </p:sp>
       <p:sp>
         <p:nvSpPr>
-          <p:cNvPr id="34" name=""/>
+          <p:cNvPr id="34" name="Shape 34"/>
           <p:cNvSpPr txBox="1"/>
           <p:nvPr/>
         </p:nvSpPr>
@@ -7708,7 +7708,7 @@
       </p:sp>
       <p:sp>
         <p:nvSpPr>
-          <p:cNvPr id="35" name=""/>
+          <p:cNvPr id="35" name="Shape 35"/>
           <p:cNvSpPr txBox="1"/>
           <p:nvPr/>
         </p:nvSpPr>
@@ -7743,7 +7743,7 @@
       </p:sp>
       <p:sp>
         <p:nvSpPr>
-          <p:cNvPr id="36" name=""/>
+          <p:cNvPr id="36" name="Shape 36"/>
           <p:cNvSpPr/>
           <p:nvPr/>
         </p:nvSpPr>
@@ -7765,7 +7765,7 @@
       </p:sp>
       <p:sp>
         <p:nvSpPr>
-          <p:cNvPr id="37" name=""/>
+          <p:cNvPr id="37" name="Shape 37"/>
           <p:cNvSpPr txBox="1"/>
           <p:nvPr/>
         </p:nvSpPr>
@@ -7800,7 +7800,7 @@
       </p:sp>
       <p:sp>
         <p:nvSpPr>
-          <p:cNvPr id="38" name=""/>
+          <p:cNvPr id="38" name="Shape 38"/>
           <p:cNvSpPr txBox="1"/>
           <p:nvPr/>
         </p:nvSpPr>
@@ -7835,7 +7835,7 @@
       </p:sp>
       <p:sp>
         <p:nvSpPr>
-          <p:cNvPr id="39" name=""/>
+          <p:cNvPr id="39" name="Shape 39"/>
           <p:cNvSpPr/>
           <p:nvPr/>
         </p:nvSpPr>
@@ -7857,7 +7857,7 @@
       </p:sp>
       <p:sp>
         <p:nvSpPr>
-          <p:cNvPr id="40" name=""/>
+          <p:cNvPr id="40" name="Shape 40"/>
           <p:cNvSpPr txBox="1"/>
           <p:nvPr/>
         </p:nvSpPr>
@@ -7892,7 +7892,7 @@
       </p:sp>
       <p:sp>
         <p:nvSpPr>
-          <p:cNvPr id="41" name=""/>
+          <p:cNvPr id="41" name="Shape 41"/>
           <p:cNvSpPr txBox="1"/>
           <p:nvPr/>
         </p:nvSpPr>
@@ -7927,7 +7927,7 @@
       </p:sp>
       <p:sp>
         <p:nvSpPr>
-          <p:cNvPr id="42" name=""/>
+          <p:cNvPr id="42" name="Shape 42"/>
           <p:cNvSpPr/>
           <p:nvPr/>
         </p:nvSpPr>
@@ -7949,7 +7949,7 @@
       </p:sp>
       <p:sp>
         <p:nvSpPr>
-          <p:cNvPr id="43" name=""/>
+          <p:cNvPr id="43" name="Shape 43"/>
           <p:cNvSpPr txBox="1"/>
           <p:nvPr/>
         </p:nvSpPr>
@@ -7984,7 +7984,7 @@
       </p:sp>
       <p:sp>
         <p:nvSpPr>
-          <p:cNvPr id="44" name=""/>
+          <p:cNvPr id="44" name="Shape 44"/>
           <p:cNvSpPr txBox="1"/>
           <p:nvPr/>
         </p:nvSpPr>
@@ -8019,7 +8019,7 @@
       </p:sp>
       <p:sp>
         <p:nvSpPr>
-          <p:cNvPr id="45" name=""/>
+          <p:cNvPr id="45" name="Shape 45"/>
           <p:cNvSpPr/>
           <p:nvPr/>
         </p:nvSpPr>
@@ -8041,7 +8041,7 @@
       </p:sp>
       <p:sp>
         <p:nvSpPr>
-          <p:cNvPr id="46" name=""/>
+          <p:cNvPr id="46" name="Shape 46"/>
           <p:cNvSpPr txBox="1"/>
           <p:nvPr/>
         </p:nvSpPr>
@@ -8087,14 +8087,14 @@
   <p:cSld>
     <p:spTree>
       <p:nvGrpSpPr>
-        <p:cNvPr id="1" name=""/>
+        <p:cNvPr id="1" name="Shape 1"/>
         <p:cNvGrpSpPr/>
         <p:nvPr/>
       </p:nvGrpSpPr>
       <p:grpSpPr/>
       <p:sp>
         <p:nvSpPr>
-          <p:cNvPr id="2" name=""/>
+          <p:cNvPr id="2" name="Shape 2"/>
           <p:cNvSpPr/>
           <p:nvPr/>
         </p:nvSpPr>
@@ -8116,7 +8116,7 @@
       </p:sp>
       <p:sp>
         <p:nvSpPr>
-          <p:cNvPr id="3" name=""/>
+          <p:cNvPr id="3" name="Shape 3"/>
           <p:cNvSpPr/>
           <p:nvPr/>
         </p:nvSpPr>
@@ -8138,7 +8138,7 @@
       </p:sp>
       <p:sp>
         <p:nvSpPr>
-          <p:cNvPr id="4" name=""/>
+          <p:cNvPr id="4" name="Shape 4"/>
           <p:cNvSpPr txBox="1"/>
           <p:nvPr/>
         </p:nvSpPr>
@@ -8173,7 +8173,7 @@
       </p:sp>
       <p:sp>
         <p:nvSpPr>
-          <p:cNvPr id="5" name=""/>
+          <p:cNvPr id="5" name="Shape 5"/>
           <p:cNvSpPr txBox="1"/>
           <p:nvPr/>
         </p:nvSpPr>
@@ -8208,7 +8208,7 @@
       </p:sp>
       <p:pic>
         <p:nvPicPr>
-          <p:cNvPr id="6" name="" descr="logo_s.png"/>
+          <p:cNvPr id="6" name="Shape 6" descr="logo_s.png"/>
           <p:cNvPicPr>
             <a:picLocks noChangeAspect="1"/>
           </p:cNvPicPr>
@@ -8232,7 +8232,7 @@
       </p:pic>
       <p:sp>
         <p:nvSpPr>
-          <p:cNvPr id="7" name=""/>
+          <p:cNvPr id="7" name="Shape 7"/>
           <p:cNvSpPr/>
           <p:nvPr/>
         </p:nvSpPr>
@@ -8254,7 +8254,7 @@
       </p:sp>
       <p:sp>
         <p:nvSpPr>
-          <p:cNvPr id="8" name=""/>
+          <p:cNvPr id="8" name="Shape 8"/>
           <p:cNvSpPr txBox="1"/>
           <p:nvPr/>
         </p:nvSpPr>
@@ -8289,7 +8289,7 @@
       </p:sp>
       <p:sp>
         <p:nvSpPr>
-          <p:cNvPr id="9" name=""/>
+          <p:cNvPr id="9" name="Shape 9"/>
           <p:cNvSpPr txBox="1"/>
           <p:nvPr/>
         </p:nvSpPr>
@@ -8324,7 +8324,7 @@
       </p:sp>
       <p:sp>
         <p:nvSpPr>
-          <p:cNvPr id="10" name=""/>
+          <p:cNvPr id="10" name="Shape 10"/>
           <p:cNvSpPr/>
           <p:nvPr/>
         </p:nvSpPr>
@@ -8348,7 +8348,7 @@
       </p:sp>
       <p:sp>
         <p:nvSpPr>
-          <p:cNvPr id="11" name=""/>
+          <p:cNvPr id="11" name="Shape 11"/>
           <p:cNvSpPr txBox="1"/>
           <p:nvPr/>
         </p:nvSpPr>
@@ -8383,7 +8383,7 @@
       </p:sp>
       <p:sp>
         <p:nvSpPr>
-          <p:cNvPr id="12" name=""/>
+          <p:cNvPr id="12" name="Shape 12"/>
           <p:cNvSpPr txBox="1"/>
           <p:nvPr/>
         </p:nvSpPr>
@@ -8418,7 +8418,7 @@
       </p:sp>
       <p:sp>
         <p:nvSpPr>
-          <p:cNvPr id="13" name=""/>
+          <p:cNvPr id="13" name="Shape 13"/>
           <p:cNvSpPr txBox="1"/>
           <p:nvPr/>
         </p:nvSpPr>
@@ -8473,7 +8473,7 @@
       </p:sp>
       <p:sp>
         <p:nvSpPr>
-          <p:cNvPr id="14" name=""/>
+          <p:cNvPr id="14" name="Shape 14"/>
           <p:cNvSpPr/>
           <p:nvPr/>
         </p:nvSpPr>
@@ -8499,7 +8499,7 @@
       </p:sp>
       <p:sp>
         <p:nvSpPr>
-          <p:cNvPr id="15" name=""/>
+          <p:cNvPr id="15" name="Shape 15"/>
           <p:cNvSpPr txBox="1"/>
           <p:nvPr/>
         </p:nvSpPr>
@@ -8534,7 +8534,7 @@
       </p:sp>
       <p:sp>
         <p:nvSpPr>
-          <p:cNvPr id="16" name=""/>
+          <p:cNvPr id="16" name="Shape 16"/>
           <p:cNvSpPr txBox="1"/>
           <p:nvPr/>
         </p:nvSpPr>
@@ -8600,14 +8600,14 @@
   <p:cSld>
     <p:spTree>
       <p:nvGrpSpPr>
-        <p:cNvPr id="1" name=""/>
+        <p:cNvPr id="1" name="Shape 1"/>
         <p:cNvGrpSpPr/>
         <p:nvPr/>
       </p:nvGrpSpPr>
       <p:grpSpPr/>
       <p:sp>
         <p:nvSpPr>
-          <p:cNvPr id="2" name=""/>
+          <p:cNvPr id="2" name="Shape 2"/>
           <p:cNvSpPr/>
           <p:nvPr/>
         </p:nvSpPr>
@@ -8629,7 +8629,7 @@
       </p:sp>
       <p:sp>
         <p:nvSpPr>
-          <p:cNvPr id="3" name=""/>
+          <p:cNvPr id="3" name="Shape 3"/>
           <p:cNvSpPr/>
           <p:nvPr/>
         </p:nvSpPr>
@@ -8651,7 +8651,7 @@
       </p:sp>
       <p:sp>
         <p:nvSpPr>
-          <p:cNvPr id="4" name=""/>
+          <p:cNvPr id="4" name="Shape 4"/>
           <p:cNvSpPr txBox="1"/>
           <p:nvPr/>
         </p:nvSpPr>
@@ -8686,7 +8686,7 @@
       </p:sp>
       <p:sp>
         <p:nvSpPr>
-          <p:cNvPr id="5" name=""/>
+          <p:cNvPr id="5" name="Shape 5"/>
           <p:cNvSpPr txBox="1"/>
           <p:nvPr/>
         </p:nvSpPr>
@@ -8721,7 +8721,7 @@
       </p:sp>
       <p:pic>
         <p:nvPicPr>
-          <p:cNvPr id="6" name="" descr="logo_s.png"/>
+          <p:cNvPr id="6" name="Shape 6" descr="logo_s.png"/>
           <p:cNvPicPr>
             <a:picLocks noChangeAspect="1"/>
           </p:cNvPicPr>
@@ -8745,7 +8745,7 @@
       </p:pic>
       <p:sp>
         <p:nvSpPr>
-          <p:cNvPr id="7" name=""/>
+          <p:cNvPr id="7" name="Shape 7"/>
           <p:cNvSpPr/>
           <p:nvPr/>
         </p:nvSpPr>
@@ -8767,7 +8767,7 @@
       </p:sp>
       <p:sp>
         <p:nvSpPr>
-          <p:cNvPr id="8" name=""/>
+          <p:cNvPr id="8" name="Shape 8"/>
           <p:cNvSpPr txBox="1"/>
           <p:nvPr/>
         </p:nvSpPr>
@@ -8802,7 +8802,7 @@
       </p:sp>
       <p:sp>
         <p:nvSpPr>
-          <p:cNvPr id="9" name=""/>
+          <p:cNvPr id="9" name="Shape 9"/>
           <p:cNvSpPr txBox="1"/>
           <p:nvPr/>
         </p:nvSpPr>
@@ -8837,7 +8837,7 @@
       </p:sp>
       <p:sp>
         <p:nvSpPr>
-          <p:cNvPr id="10" name=""/>
+          <p:cNvPr id="10" name="Shape 10"/>
           <p:cNvSpPr/>
           <p:nvPr/>
         </p:nvSpPr>
@@ -8861,7 +8861,7 @@
       </p:sp>
       <p:sp>
         <p:nvSpPr>
-          <p:cNvPr id="11" name=""/>
+          <p:cNvPr id="11" name="Shape 11"/>
           <p:cNvSpPr txBox="1"/>
           <p:nvPr/>
         </p:nvSpPr>
@@ -8896,7 +8896,7 @@
       </p:sp>
       <p:sp>
         <p:nvSpPr>
-          <p:cNvPr id="12" name=""/>
+          <p:cNvPr id="12" name="Shape 12"/>
           <p:cNvSpPr txBox="1"/>
           <p:nvPr/>
         </p:nvSpPr>
@@ -8931,7 +8931,7 @@
       </p:sp>
       <p:sp>
         <p:nvSpPr>
-          <p:cNvPr id="13" name=""/>
+          <p:cNvPr id="13" name="Shape 13"/>
           <p:cNvSpPr txBox="1"/>
           <p:nvPr/>
         </p:nvSpPr>
@@ -8966,7 +8966,7 @@
       </p:sp>
       <p:sp>
         <p:nvSpPr>
-          <p:cNvPr id="14" name=""/>
+          <p:cNvPr id="14" name="Shape 14"/>
           <p:cNvSpPr/>
           <p:nvPr/>
         </p:nvSpPr>
@@ -8990,7 +8990,7 @@
       </p:sp>
       <p:sp>
         <p:nvSpPr>
-          <p:cNvPr id="15" name=""/>
+          <p:cNvPr id="15" name="Shape 15"/>
           <p:cNvSpPr txBox="1"/>
           <p:nvPr/>
         </p:nvSpPr>
@@ -9025,7 +9025,7 @@
       </p:sp>
       <p:sp>
         <p:nvSpPr>
-          <p:cNvPr id="16" name=""/>
+          <p:cNvPr id="16" name="Shape 16"/>
           <p:cNvSpPr txBox="1"/>
           <p:nvPr/>
         </p:nvSpPr>
@@ -9060,7 +9060,7 @@
       </p:sp>
       <p:sp>
         <p:nvSpPr>
-          <p:cNvPr id="17" name=""/>
+          <p:cNvPr id="17" name="Shape 17"/>
           <p:cNvSpPr txBox="1"/>
           <p:nvPr/>
         </p:nvSpPr>
@@ -9095,7 +9095,7 @@
       </p:sp>
       <p:sp>
         <p:nvSpPr>
-          <p:cNvPr id="18" name=""/>
+          <p:cNvPr id="18" name="Shape 18"/>
           <p:cNvSpPr/>
           <p:nvPr/>
         </p:nvSpPr>
@@ -9119,7 +9119,7 @@
       </p:sp>
       <p:sp>
         <p:nvSpPr>
-          <p:cNvPr id="19" name=""/>
+          <p:cNvPr id="19" name="Shape 19"/>
           <p:cNvSpPr txBox="1"/>
           <p:nvPr/>
         </p:nvSpPr>
@@ -9154,7 +9154,7 @@
       </p:sp>
       <p:sp>
         <p:nvSpPr>
-          <p:cNvPr id="20" name=""/>
+          <p:cNvPr id="20" name="Shape 20"/>
           <p:cNvSpPr txBox="1"/>
           <p:nvPr/>
         </p:nvSpPr>
@@ -9189,7 +9189,7 @@
       </p:sp>
       <p:sp>
         <p:nvSpPr>
-          <p:cNvPr id="21" name=""/>
+          <p:cNvPr id="21" name="Shape 21"/>
           <p:cNvSpPr txBox="1"/>
           <p:nvPr/>
         </p:nvSpPr>
@@ -9224,7 +9224,7 @@
       </p:sp>
       <p:sp>
         <p:nvSpPr>
-          <p:cNvPr id="22" name=""/>
+          <p:cNvPr id="22" name="Shape 22"/>
           <p:cNvSpPr txBox="1"/>
           <p:nvPr/>
         </p:nvSpPr>
@@ -9259,7 +9259,7 @@
       </p:sp>
       <p:sp>
         <p:nvSpPr>
-          <p:cNvPr id="23" name=""/>
+          <p:cNvPr id="23" name="Shape 23"/>
           <p:cNvSpPr txBox="1"/>
           <p:nvPr/>
         </p:nvSpPr>
@@ -9294,7 +9294,7 @@
       </p:sp>
       <p:sp>
         <p:nvSpPr>
-          <p:cNvPr id="24" name=""/>
+          <p:cNvPr id="24" name="Shape 24"/>
           <p:cNvSpPr/>
           <p:nvPr/>
         </p:nvSpPr>
@@ -9316,7 +9316,7 @@
       </p:sp>
       <p:sp>
         <p:nvSpPr>
-          <p:cNvPr id="25" name=""/>
+          <p:cNvPr id="25" name="Shape 25"/>
           <p:cNvSpPr txBox="1"/>
           <p:nvPr/>
         </p:nvSpPr>
@@ -9351,7 +9351,7 @@
       </p:sp>
       <p:sp>
         <p:nvSpPr>
-          <p:cNvPr id="26" name=""/>
+          <p:cNvPr id="26" name="Shape 26"/>
           <p:cNvSpPr txBox="1"/>
           <p:nvPr/>
         </p:nvSpPr>
@@ -9386,7 +9386,7 @@
       </p:sp>
       <p:sp>
         <p:nvSpPr>
-          <p:cNvPr id="27" name=""/>
+          <p:cNvPr id="27" name="Shape 27"/>
           <p:cNvSpPr/>
           <p:nvPr/>
         </p:nvSpPr>
@@ -9408,7 +9408,7 @@
       </p:sp>
       <p:sp>
         <p:nvSpPr>
-          <p:cNvPr id="28" name=""/>
+          <p:cNvPr id="28" name="Shape 28"/>
           <p:cNvSpPr txBox="1"/>
           <p:nvPr/>
         </p:nvSpPr>
@@ -9443,7 +9443,7 @@
       </p:sp>
       <p:sp>
         <p:nvSpPr>
-          <p:cNvPr id="29" name=""/>
+          <p:cNvPr id="29" name="Shape 29"/>
           <p:cNvSpPr txBox="1"/>
           <p:nvPr/>
         </p:nvSpPr>
@@ -9478,7 +9478,7 @@
       </p:sp>
       <p:sp>
         <p:nvSpPr>
-          <p:cNvPr id="30" name=""/>
+          <p:cNvPr id="30" name="Shape 30"/>
           <p:cNvSpPr/>
           <p:nvPr/>
         </p:nvSpPr>
@@ -9500,7 +9500,7 @@
       </p:sp>
       <p:sp>
         <p:nvSpPr>
-          <p:cNvPr id="31" name=""/>
+          <p:cNvPr id="31" name="Shape 31"/>
           <p:cNvSpPr txBox="1"/>
           <p:nvPr/>
         </p:nvSpPr>
@@ -9535,7 +9535,7 @@
       </p:sp>
       <p:sp>
         <p:nvSpPr>
-          <p:cNvPr id="32" name=""/>
+          <p:cNvPr id="32" name="Shape 32"/>
           <p:cNvSpPr txBox="1"/>
           <p:nvPr/>
         </p:nvSpPr>
@@ -9570,7 +9570,7 @@
       </p:sp>
       <p:sp>
         <p:nvSpPr>
-          <p:cNvPr id="33" name=""/>
+          <p:cNvPr id="33" name="Shape 33"/>
           <p:cNvSpPr/>
           <p:nvPr/>
         </p:nvSpPr>
@@ -9592,7 +9592,7 @@
       </p:sp>
       <p:sp>
         <p:nvSpPr>
-          <p:cNvPr id="34" name=""/>
+          <p:cNvPr id="34" name="Shape 34"/>
           <p:cNvSpPr txBox="1"/>
           <p:nvPr/>
         </p:nvSpPr>
@@ -9627,7 +9627,7 @@
       </p:sp>
       <p:sp>
         <p:nvSpPr>
-          <p:cNvPr id="35" name=""/>
+          <p:cNvPr id="35" name="Shape 35"/>
           <p:cNvSpPr txBox="1"/>
           <p:nvPr/>
         </p:nvSpPr>
@@ -9662,7 +9662,7 @@
       </p:sp>
       <p:sp>
         <p:nvSpPr>
-          <p:cNvPr id="36" name=""/>
+          <p:cNvPr id="36" name="Shape 36"/>
           <p:cNvSpPr/>
           <p:nvPr/>
         </p:nvSpPr>
@@ -9684,7 +9684,7 @@
       </p:sp>
       <p:sp>
         <p:nvSpPr>
-          <p:cNvPr id="37" name=""/>
+          <p:cNvPr id="37" name="Shape 37"/>
           <p:cNvSpPr txBox="1"/>
           <p:nvPr/>
         </p:nvSpPr>
@@ -9719,7 +9719,7 @@
       </p:sp>
       <p:sp>
         <p:nvSpPr>
-          <p:cNvPr id="38" name=""/>
+          <p:cNvPr id="38" name="Shape 38"/>
           <p:cNvSpPr txBox="1"/>
           <p:nvPr/>
         </p:nvSpPr>
@@ -9754,7 +9754,7 @@
       </p:sp>
       <p:sp>
         <p:nvSpPr>
-          <p:cNvPr id="39" name=""/>
+          <p:cNvPr id="39" name="Shape 39"/>
           <p:cNvSpPr/>
           <p:nvPr/>
         </p:nvSpPr>
@@ -9776,7 +9776,7 @@
       </p:sp>
       <p:sp>
         <p:nvSpPr>
-          <p:cNvPr id="40" name=""/>
+          <p:cNvPr id="40" name="Shape 40"/>
           <p:cNvSpPr txBox="1"/>
           <p:nvPr/>
         </p:nvSpPr>
@@ -9811,7 +9811,7 @@
       </p:sp>
       <p:sp>
         <p:nvSpPr>
-          <p:cNvPr id="41" name=""/>
+          <p:cNvPr id="41" name="Shape 41"/>
           <p:cNvSpPr txBox="1"/>
           <p:nvPr/>
         </p:nvSpPr>
@@ -9846,7 +9846,7 @@
       </p:sp>
       <p:sp>
         <p:nvSpPr>
-          <p:cNvPr id="42" name=""/>
+          <p:cNvPr id="42" name="Shape 42"/>
           <p:cNvSpPr/>
           <p:nvPr/>
         </p:nvSpPr>
@@ -9868,7 +9868,7 @@
       </p:sp>
       <p:sp>
         <p:nvSpPr>
-          <p:cNvPr id="43" name=""/>
+          <p:cNvPr id="43" name="Shape 43"/>
           <p:cNvSpPr txBox="1"/>
           <p:nvPr/>
         </p:nvSpPr>
@@ -9903,7 +9903,7 @@
       </p:sp>
       <p:sp>
         <p:nvSpPr>
-          <p:cNvPr id="44" name=""/>
+          <p:cNvPr id="44" name="Shape 44"/>
           <p:cNvSpPr txBox="1"/>
           <p:nvPr/>
         </p:nvSpPr>
@@ -9938,7 +9938,7 @@
       </p:sp>
       <p:sp>
         <p:nvSpPr>
-          <p:cNvPr id="45" name=""/>
+          <p:cNvPr id="45" name="Shape 45"/>
           <p:cNvSpPr/>
           <p:nvPr/>
         </p:nvSpPr>
@@ -9960,7 +9960,7 @@
       </p:sp>
       <p:sp>
         <p:nvSpPr>
-          <p:cNvPr id="46" name=""/>
+          <p:cNvPr id="46" name="Shape 46"/>
           <p:cNvSpPr txBox="1"/>
           <p:nvPr/>
         </p:nvSpPr>
@@ -9995,7 +9995,7 @@
       </p:sp>
       <p:sp>
         <p:nvSpPr>
-          <p:cNvPr id="47" name=""/>
+          <p:cNvPr id="47" name="Shape 47"/>
           <p:cNvSpPr txBox="1"/>
           <p:nvPr/>
         </p:nvSpPr>
@@ -10030,7 +10030,7 @@
       </p:sp>
       <p:sp>
         <p:nvSpPr>
-          <p:cNvPr id="48" name=""/>
+          <p:cNvPr id="48" name="Shape 48"/>
           <p:cNvSpPr/>
           <p:nvPr/>
         </p:nvSpPr>
@@ -10052,7 +10052,7 @@
       </p:sp>
       <p:sp>
         <p:nvSpPr>
-          <p:cNvPr id="49" name=""/>
+          <p:cNvPr id="49" name="Shape 49"/>
           <p:cNvSpPr txBox="1"/>
           <p:nvPr/>
         </p:nvSpPr>
@@ -10087,7 +10087,7 @@
       </p:sp>
       <p:sp>
         <p:nvSpPr>
-          <p:cNvPr id="50" name=""/>
+          <p:cNvPr id="50" name="Shape 50"/>
           <p:cNvSpPr txBox="1"/>
           <p:nvPr/>
         </p:nvSpPr>
@@ -10122,7 +10122,7 @@
       </p:sp>
       <p:sp>
         <p:nvSpPr>
-          <p:cNvPr id="51" name=""/>
+          <p:cNvPr id="51" name="Shape 51"/>
           <p:cNvSpPr/>
           <p:nvPr/>
         </p:nvSpPr>
@@ -10144,7 +10144,7 @@
       </p:sp>
       <p:sp>
         <p:nvSpPr>
-          <p:cNvPr id="52" name=""/>
+          <p:cNvPr id="52" name="Shape 52"/>
           <p:cNvSpPr txBox="1"/>
           <p:nvPr/>
         </p:nvSpPr>
@@ -10190,14 +10190,14 @@
   <p:cSld>
     <p:spTree>
       <p:nvGrpSpPr>
-        <p:cNvPr id="1" name=""/>
+        <p:cNvPr id="1" name="Shape 1"/>
         <p:cNvGrpSpPr/>
         <p:nvPr/>
       </p:nvGrpSpPr>
       <p:grpSpPr/>
       <p:sp>
         <p:nvSpPr>
-          <p:cNvPr id="2" name=""/>
+          <p:cNvPr id="2" name="Shape 2"/>
           <p:cNvSpPr/>
           <p:nvPr/>
         </p:nvSpPr>
@@ -10219,7 +10219,7 @@
       </p:sp>
       <p:sp>
         <p:nvSpPr>
-          <p:cNvPr id="3" name=""/>
+          <p:cNvPr id="3" name="Shape 3"/>
           <p:cNvSpPr/>
           <p:nvPr/>
         </p:nvSpPr>
@@ -10241,7 +10241,7 @@
       </p:sp>
       <p:sp>
         <p:nvSpPr>
-          <p:cNvPr id="4" name=""/>
+          <p:cNvPr id="4" name="Shape 4"/>
           <p:cNvSpPr txBox="1"/>
           <p:nvPr/>
         </p:nvSpPr>
@@ -10276,7 +10276,7 @@
       </p:sp>
       <p:sp>
         <p:nvSpPr>
-          <p:cNvPr id="5" name=""/>
+          <p:cNvPr id="5" name="Shape 5"/>
           <p:cNvSpPr txBox="1"/>
           <p:nvPr/>
         </p:nvSpPr>
@@ -10311,7 +10311,7 @@
       </p:sp>
       <p:pic>
         <p:nvPicPr>
-          <p:cNvPr id="6" name="" descr="logo_s.png"/>
+          <p:cNvPr id="6" name="Shape 6" descr="logo_s.png"/>
           <p:cNvPicPr>
             <a:picLocks noChangeAspect="1"/>
           </p:cNvPicPr>
@@ -10335,7 +10335,7 @@
       </p:pic>
       <p:sp>
         <p:nvSpPr>
-          <p:cNvPr id="7" name=""/>
+          <p:cNvPr id="7" name="Shape 7"/>
           <p:cNvSpPr/>
           <p:nvPr/>
         </p:nvSpPr>
@@ -10357,7 +10357,7 @@
       </p:sp>
       <p:sp>
         <p:nvSpPr>
-          <p:cNvPr id="8" name=""/>
+          <p:cNvPr id="8" name="Shape 8"/>
           <p:cNvSpPr txBox="1"/>
           <p:nvPr/>
         </p:nvSpPr>
@@ -10392,7 +10392,7 @@
       </p:sp>
       <p:sp>
         <p:nvSpPr>
-          <p:cNvPr id="9" name=""/>
+          <p:cNvPr id="9" name="Shape 9"/>
           <p:cNvSpPr txBox="1"/>
           <p:nvPr/>
         </p:nvSpPr>
@@ -10427,7 +10427,7 @@
       </p:sp>
       <p:graphicFrame>
         <p:nvGraphicFramePr>
-          <p:cNvPr id="10" name=""/>
+          <p:cNvPr id="10" name="Shape 10"/>
           <p:cNvGraphicFramePr>
             <a:graphicFrameLocks noGrp="1"/>
           </p:cNvGraphicFramePr>
@@ -11218,14 +11218,14 @@
   <p:cSld>
     <p:spTree>
       <p:nvGrpSpPr>
-        <p:cNvPr id="1" name=""/>
+        <p:cNvPr id="1" name="Shape 1"/>
         <p:cNvGrpSpPr/>
         <p:nvPr/>
       </p:nvGrpSpPr>
       <p:grpSpPr/>
       <p:sp>
         <p:nvSpPr>
-          <p:cNvPr id="2" name=""/>
+          <p:cNvPr id="2" name="Shape 2"/>
           <p:cNvSpPr/>
           <p:nvPr/>
         </p:nvSpPr>
@@ -11247,7 +11247,7 @@
       </p:sp>
       <p:sp>
         <p:nvSpPr>
-          <p:cNvPr id="3" name=""/>
+          <p:cNvPr id="3" name="Shape 3"/>
           <p:cNvSpPr/>
           <p:nvPr/>
         </p:nvSpPr>
@@ -11269,7 +11269,7 @@
       </p:sp>
       <p:sp>
         <p:nvSpPr>
-          <p:cNvPr id="4" name=""/>
+          <p:cNvPr id="4" name="Shape 4"/>
           <p:cNvSpPr txBox="1"/>
           <p:nvPr/>
         </p:nvSpPr>
@@ -11304,7 +11304,7 @@
       </p:sp>
       <p:sp>
         <p:nvSpPr>
-          <p:cNvPr id="5" name=""/>
+          <p:cNvPr id="5" name="Shape 5"/>
           <p:cNvSpPr txBox="1"/>
           <p:nvPr/>
         </p:nvSpPr>
@@ -11339,7 +11339,7 @@
       </p:sp>
       <p:pic>
         <p:nvPicPr>
-          <p:cNvPr id="6" name="" descr="logo_s.png"/>
+          <p:cNvPr id="6" name="Shape 6" descr="logo_s.png"/>
           <p:cNvPicPr>
             <a:picLocks noChangeAspect="1"/>
           </p:cNvPicPr>
@@ -11363,7 +11363,7 @@
       </p:pic>
       <p:sp>
         <p:nvSpPr>
-          <p:cNvPr id="7" name=""/>
+          <p:cNvPr id="7" name="Shape 7"/>
           <p:cNvSpPr/>
           <p:nvPr/>
         </p:nvSpPr>
@@ -11387,7 +11387,7 @@
       </p:sp>
       <p:sp>
         <p:nvSpPr>
-          <p:cNvPr id="8" name=""/>
+          <p:cNvPr id="8" name="Shape 8"/>
           <p:cNvSpPr txBox="1"/>
           <p:nvPr/>
         </p:nvSpPr>
@@ -11422,7 +11422,7 @@
       </p:sp>
       <p:sp>
         <p:nvSpPr>
-          <p:cNvPr id="9" name=""/>
+          <p:cNvPr id="9" name="Shape 9"/>
           <p:cNvSpPr txBox="1"/>
           <p:nvPr/>
         </p:nvSpPr>
@@ -11457,7 +11457,7 @@
       </p:sp>
       <p:sp>
         <p:nvSpPr>
-          <p:cNvPr id="10" name=""/>
+          <p:cNvPr id="10" name="Shape 10"/>
           <p:cNvSpPr txBox="1"/>
           <p:nvPr/>
         </p:nvSpPr>
@@ -11492,7 +11492,7 @@
       </p:sp>
       <p:sp>
         <p:nvSpPr>
-          <p:cNvPr id="11" name=""/>
+          <p:cNvPr id="11" name="Shape 11"/>
           <p:cNvSpPr/>
           <p:nvPr/>
         </p:nvSpPr>
@@ -11516,7 +11516,7 @@
       </p:sp>
       <p:sp>
         <p:nvSpPr>
-          <p:cNvPr id="12" name=""/>
+          <p:cNvPr id="12" name="Shape 12"/>
           <p:cNvSpPr txBox="1"/>
           <p:nvPr/>
         </p:nvSpPr>
@@ -11551,7 +11551,7 @@
       </p:sp>
       <p:sp>
         <p:nvSpPr>
-          <p:cNvPr id="13" name=""/>
+          <p:cNvPr id="13" name="Shape 13"/>
           <p:cNvSpPr txBox="1"/>
           <p:nvPr/>
         </p:nvSpPr>
@@ -11586,7 +11586,7 @@
       </p:sp>
       <p:sp>
         <p:nvSpPr>
-          <p:cNvPr id="14" name=""/>
+          <p:cNvPr id="14" name="Shape 14"/>
           <p:cNvSpPr txBox="1"/>
           <p:nvPr/>
         </p:nvSpPr>
@@ -11621,7 +11621,7 @@
       </p:sp>
       <p:sp>
         <p:nvSpPr>
-          <p:cNvPr id="15" name=""/>
+          <p:cNvPr id="15" name="Shape 15"/>
           <p:cNvSpPr/>
           <p:nvPr/>
         </p:nvSpPr>
@@ -11645,7 +11645,7 @@
       </p:sp>
       <p:sp>
         <p:nvSpPr>
-          <p:cNvPr id="16" name=""/>
+          <p:cNvPr id="16" name="Shape 16"/>
           <p:cNvSpPr txBox="1"/>
           <p:nvPr/>
         </p:nvSpPr>
@@ -11680,7 +11680,7 @@
       </p:sp>
       <p:sp>
         <p:nvSpPr>
-          <p:cNvPr id="17" name=""/>
+          <p:cNvPr id="17" name="Shape 17"/>
           <p:cNvSpPr txBox="1"/>
           <p:nvPr/>
         </p:nvSpPr>
@@ -11715,7 +11715,7 @@
       </p:sp>
       <p:sp>
         <p:nvSpPr>
-          <p:cNvPr id="18" name=""/>
+          <p:cNvPr id="18" name="Shape 18"/>
           <p:cNvSpPr txBox="1"/>
           <p:nvPr/>
         </p:nvSpPr>
@@ -11750,7 +11750,7 @@
       </p:sp>
       <p:sp>
         <p:nvSpPr>
-          <p:cNvPr id="19" name=""/>
+          <p:cNvPr id="19" name="Shape 19"/>
           <p:cNvSpPr/>
           <p:nvPr/>
         </p:nvSpPr>
@@ -11774,7 +11774,7 @@
       </p:sp>
       <p:sp>
         <p:nvSpPr>
-          <p:cNvPr id="20" name=""/>
+          <p:cNvPr id="20" name="Shape 20"/>
           <p:cNvSpPr txBox="1"/>
           <p:nvPr/>
         </p:nvSpPr>
@@ -11809,7 +11809,7 @@
       </p:sp>
       <p:sp>
         <p:nvSpPr>
-          <p:cNvPr id="21" name=""/>
+          <p:cNvPr id="21" name="Shape 21"/>
           <p:cNvSpPr txBox="1"/>
           <p:nvPr/>
         </p:nvSpPr>
@@ -11844,7 +11844,7 @@
       </p:sp>
       <p:sp>
         <p:nvSpPr>
-          <p:cNvPr id="22" name=""/>
+          <p:cNvPr id="22" name="Shape 22"/>
           <p:cNvSpPr txBox="1"/>
           <p:nvPr/>
         </p:nvSpPr>
@@ -11879,7 +11879,7 @@
       </p:sp>
       <p:sp>
         <p:nvSpPr>
-          <p:cNvPr id="23" name=""/>
+          <p:cNvPr id="23" name="Shape 23"/>
           <p:cNvSpPr txBox="1"/>
           <p:nvPr/>
         </p:nvSpPr>
@@ -11914,7 +11914,7 @@
       </p:sp>
       <p:sp>
         <p:nvSpPr>
-          <p:cNvPr id="24" name=""/>
+          <p:cNvPr id="24" name="Shape 24"/>
           <p:cNvSpPr/>
           <p:nvPr/>
         </p:nvSpPr>
@@ -11936,7 +11936,7 @@
       </p:sp>
       <p:sp>
         <p:nvSpPr>
-          <p:cNvPr id="25" name=""/>
+          <p:cNvPr id="25" name="Shape 25"/>
           <p:cNvSpPr txBox="1"/>
           <p:nvPr/>
         </p:nvSpPr>
@@ -11971,7 +11971,7 @@
       </p:sp>
       <p:sp>
         <p:nvSpPr>
-          <p:cNvPr id="26" name=""/>
+          <p:cNvPr id="26" name="Shape 26"/>
           <p:cNvSpPr txBox="1"/>
           <p:nvPr/>
         </p:nvSpPr>
@@ -12006,7 +12006,7 @@
       </p:sp>
       <p:sp>
         <p:nvSpPr>
-          <p:cNvPr id="27" name=""/>
+          <p:cNvPr id="27" name="Shape 27"/>
           <p:cNvSpPr/>
           <p:nvPr/>
         </p:nvSpPr>
@@ -12028,7 +12028,7 @@
       </p:sp>
       <p:sp>
         <p:nvSpPr>
-          <p:cNvPr id="28" name=""/>
+          <p:cNvPr id="28" name="Shape 28"/>
           <p:cNvSpPr txBox="1"/>
           <p:nvPr/>
         </p:nvSpPr>
@@ -12063,7 +12063,7 @@
       </p:sp>
       <p:sp>
         <p:nvSpPr>
-          <p:cNvPr id="29" name=""/>
+          <p:cNvPr id="29" name="Shape 29"/>
           <p:cNvSpPr txBox="1"/>
           <p:nvPr/>
         </p:nvSpPr>
@@ -12098,7 +12098,7 @@
       </p:sp>
       <p:sp>
         <p:nvSpPr>
-          <p:cNvPr id="30" name=""/>
+          <p:cNvPr id="30" name="Shape 30"/>
           <p:cNvSpPr txBox="1"/>
           <p:nvPr/>
         </p:nvSpPr>
@@ -12133,7 +12133,7 @@
       </p:sp>
       <p:sp>
         <p:nvSpPr>
-          <p:cNvPr id="31" name=""/>
+          <p:cNvPr id="31" name="Shape 31"/>
           <p:cNvSpPr/>
           <p:nvPr/>
         </p:nvSpPr>
@@ -12155,7 +12155,7 @@
       </p:sp>
       <p:sp>
         <p:nvSpPr>
-          <p:cNvPr id="32" name=""/>
+          <p:cNvPr id="32" name="Shape 32"/>
           <p:cNvSpPr txBox="1"/>
           <p:nvPr/>
         </p:nvSpPr>
@@ -12190,7 +12190,7 @@
       </p:sp>
       <p:sp>
         <p:nvSpPr>
-          <p:cNvPr id="33" name=""/>
+          <p:cNvPr id="33" name="Shape 33"/>
           <p:cNvSpPr txBox="1"/>
           <p:nvPr/>
         </p:nvSpPr>
@@ -12225,7 +12225,7 @@
       </p:sp>
       <p:sp>
         <p:nvSpPr>
-          <p:cNvPr id="34" name=""/>
+          <p:cNvPr id="34" name="Shape 34"/>
           <p:cNvSpPr/>
           <p:nvPr/>
         </p:nvSpPr>
@@ -12247,7 +12247,7 @@
       </p:sp>
       <p:sp>
         <p:nvSpPr>
-          <p:cNvPr id="35" name=""/>
+          <p:cNvPr id="35" name="Shape 35"/>
           <p:cNvSpPr txBox="1"/>
           <p:nvPr/>
         </p:nvSpPr>
@@ -12282,7 +12282,7 @@
       </p:sp>
       <p:sp>
         <p:nvSpPr>
-          <p:cNvPr id="36" name=""/>
+          <p:cNvPr id="36" name="Shape 36"/>
           <p:cNvSpPr txBox="1"/>
           <p:nvPr/>
         </p:nvSpPr>
@@ -12317,7 +12317,7 @@
       </p:sp>
       <p:sp>
         <p:nvSpPr>
-          <p:cNvPr id="37" name=""/>
+          <p:cNvPr id="37" name="Shape 37"/>
           <p:cNvSpPr txBox="1"/>
           <p:nvPr/>
         </p:nvSpPr>
@@ -12352,7 +12352,7 @@
       </p:sp>
       <p:sp>
         <p:nvSpPr>
-          <p:cNvPr id="38" name=""/>
+          <p:cNvPr id="38" name="Shape 38"/>
           <p:cNvSpPr/>
           <p:nvPr/>
         </p:nvSpPr>
@@ -12374,7 +12374,7 @@
       </p:sp>
       <p:sp>
         <p:nvSpPr>
-          <p:cNvPr id="39" name=""/>
+          <p:cNvPr id="39" name="Shape 39"/>
           <p:cNvSpPr txBox="1"/>
           <p:nvPr/>
         </p:nvSpPr>
@@ -12409,7 +12409,7 @@
       </p:sp>
       <p:sp>
         <p:nvSpPr>
-          <p:cNvPr id="40" name=""/>
+          <p:cNvPr id="40" name="Shape 40"/>
           <p:cNvSpPr txBox="1"/>
           <p:nvPr/>
         </p:nvSpPr>
@@ -12444,7 +12444,7 @@
       </p:sp>
       <p:sp>
         <p:nvSpPr>
-          <p:cNvPr id="41" name=""/>
+          <p:cNvPr id="41" name="Shape 41"/>
           <p:cNvSpPr/>
           <p:nvPr/>
         </p:nvSpPr>
@@ -12466,7 +12466,7 @@
       </p:sp>
       <p:sp>
         <p:nvSpPr>
-          <p:cNvPr id="42" name=""/>
+          <p:cNvPr id="42" name="Shape 42"/>
           <p:cNvSpPr txBox="1"/>
           <p:nvPr/>
         </p:nvSpPr>
@@ -12501,7 +12501,7 @@
       </p:sp>
       <p:sp>
         <p:nvSpPr>
-          <p:cNvPr id="43" name=""/>
+          <p:cNvPr id="43" name="Shape 43"/>
           <p:cNvSpPr txBox="1"/>
           <p:nvPr/>
         </p:nvSpPr>
@@ -12536,7 +12536,7 @@
       </p:sp>
       <p:sp>
         <p:nvSpPr>
-          <p:cNvPr id="44" name=""/>
+          <p:cNvPr id="44" name="Shape 44"/>
           <p:cNvSpPr txBox="1"/>
           <p:nvPr/>
         </p:nvSpPr>
@@ -12571,7 +12571,7 @@
       </p:sp>
       <p:sp>
         <p:nvSpPr>
-          <p:cNvPr id="45" name=""/>
+          <p:cNvPr id="45" name="Shape 45"/>
           <p:cNvSpPr txBox="1"/>
           <p:nvPr/>
         </p:nvSpPr>
@@ -12617,14 +12617,14 @@
   <p:cSld>
     <p:spTree>
       <p:nvGrpSpPr>
-        <p:cNvPr id="1" name=""/>
+        <p:cNvPr id="1" name="Shape 1"/>
         <p:cNvGrpSpPr/>
         <p:nvPr/>
       </p:nvGrpSpPr>
       <p:grpSpPr/>
       <p:sp>
         <p:nvSpPr>
-          <p:cNvPr id="2" name=""/>
+          <p:cNvPr id="2" name="Shape 2"/>
           <p:cNvSpPr/>
           <p:nvPr/>
         </p:nvSpPr>
@@ -12646,7 +12646,7 @@
       </p:sp>
       <p:sp>
         <p:nvSpPr>
-          <p:cNvPr id="3" name=""/>
+          <p:cNvPr id="3" name="Shape 3"/>
           <p:cNvSpPr/>
           <p:nvPr/>
         </p:nvSpPr>
@@ -12668,7 +12668,7 @@
       </p:sp>
       <p:sp>
         <p:nvSpPr>
-          <p:cNvPr id="4" name=""/>
+          <p:cNvPr id="4" name="Shape 4"/>
           <p:cNvSpPr txBox="1"/>
           <p:nvPr/>
         </p:nvSpPr>
@@ -12703,7 +12703,7 @@
       </p:sp>
       <p:sp>
         <p:nvSpPr>
-          <p:cNvPr id="5" name=""/>
+          <p:cNvPr id="5" name="Shape 5"/>
           <p:cNvSpPr txBox="1"/>
           <p:nvPr/>
         </p:nvSpPr>
@@ -12738,7 +12738,7 @@
       </p:sp>
       <p:pic>
         <p:nvPicPr>
-          <p:cNvPr id="6" name="" descr="logo_s.png"/>
+          <p:cNvPr id="6" name="Shape 6" descr="logo_s.png"/>
           <p:cNvPicPr>
             <a:picLocks noChangeAspect="1"/>
           </p:cNvPicPr>
@@ -12762,7 +12762,7 @@
       </p:pic>
       <p:sp>
         <p:nvSpPr>
-          <p:cNvPr id="7" name=""/>
+          <p:cNvPr id="7" name="Shape 7"/>
           <p:cNvSpPr/>
           <p:nvPr/>
         </p:nvSpPr>
@@ -12784,7 +12784,7 @@
       </p:sp>
       <p:sp>
         <p:nvSpPr>
-          <p:cNvPr id="8" name=""/>
+          <p:cNvPr id="8" name="Shape 8"/>
           <p:cNvSpPr txBox="1"/>
           <p:nvPr/>
         </p:nvSpPr>
@@ -12819,7 +12819,7 @@
       </p:sp>
       <p:sp>
         <p:nvSpPr>
-          <p:cNvPr id="9" name=""/>
+          <p:cNvPr id="9" name="Shape 9"/>
           <p:cNvSpPr txBox="1"/>
           <p:nvPr/>
         </p:nvSpPr>
@@ -12854,7 +12854,7 @@
       </p:sp>
       <p:sp>
         <p:nvSpPr>
-          <p:cNvPr id="10" name=""/>
+          <p:cNvPr id="10" name="Shape 10"/>
           <p:cNvSpPr/>
           <p:nvPr/>
         </p:nvSpPr>
@@ -12878,7 +12878,7 @@
       </p:sp>
       <p:sp>
         <p:nvSpPr>
-          <p:cNvPr id="11" name=""/>
+          <p:cNvPr id="11" name="Shape 11"/>
           <p:cNvSpPr txBox="1"/>
           <p:nvPr/>
         </p:nvSpPr>
@@ -12913,7 +12913,7 @@
       </p:sp>
       <p:sp>
         <p:nvSpPr>
-          <p:cNvPr id="12" name=""/>
+          <p:cNvPr id="12" name="Shape 12"/>
           <p:cNvSpPr txBox="1"/>
           <p:nvPr/>
         </p:nvSpPr>
@@ -12948,7 +12948,7 @@
       </p:sp>
       <p:sp>
         <p:nvSpPr>
-          <p:cNvPr id="13" name=""/>
+          <p:cNvPr id="13" name="Shape 13"/>
           <p:cNvSpPr/>
           <p:nvPr/>
         </p:nvSpPr>
@@ -12972,7 +12972,7 @@
       </p:sp>
       <p:sp>
         <p:nvSpPr>
-          <p:cNvPr id="14" name=""/>
+          <p:cNvPr id="14" name="Shape 14"/>
           <p:cNvSpPr txBox="1"/>
           <p:nvPr/>
         </p:nvSpPr>
@@ -13007,7 +13007,7 @@
       </p:sp>
       <p:sp>
         <p:nvSpPr>
-          <p:cNvPr id="15" name=""/>
+          <p:cNvPr id="15" name="Shape 15"/>
           <p:cNvSpPr txBox="1"/>
           <p:nvPr/>
         </p:nvSpPr>
@@ -13042,7 +13042,7 @@
       </p:sp>
       <p:sp>
         <p:nvSpPr>
-          <p:cNvPr id="16" name=""/>
+          <p:cNvPr id="16" name="Shape 16"/>
           <p:cNvSpPr/>
           <p:nvPr/>
         </p:nvSpPr>
@@ -13066,7 +13066,7 @@
       </p:sp>
       <p:sp>
         <p:nvSpPr>
-          <p:cNvPr id="17" name=""/>
+          <p:cNvPr id="17" name="Shape 17"/>
           <p:cNvSpPr txBox="1"/>
           <p:nvPr/>
         </p:nvSpPr>
@@ -13101,7 +13101,7 @@
       </p:sp>
       <p:sp>
         <p:nvSpPr>
-          <p:cNvPr id="18" name=""/>
+          <p:cNvPr id="18" name="Shape 18"/>
           <p:cNvSpPr txBox="1"/>
           <p:nvPr/>
         </p:nvSpPr>
@@ -13136,7 +13136,7 @@
       </p:sp>
       <p:sp>
         <p:nvSpPr>
-          <p:cNvPr id="19" name=""/>
+          <p:cNvPr id="19" name="Shape 19"/>
           <p:cNvSpPr/>
           <p:nvPr/>
         </p:nvSpPr>
@@ -13160,7 +13160,7 @@
       </p:sp>
       <p:sp>
         <p:nvSpPr>
-          <p:cNvPr id="20" name=""/>
+          <p:cNvPr id="20" name="Shape 20"/>
           <p:cNvSpPr txBox="1"/>
           <p:nvPr/>
         </p:nvSpPr>
@@ -13195,7 +13195,7 @@
       </p:sp>
       <p:sp>
         <p:nvSpPr>
-          <p:cNvPr id="21" name=""/>
+          <p:cNvPr id="21" name="Shape 21"/>
           <p:cNvSpPr txBox="1"/>
           <p:nvPr/>
         </p:nvSpPr>
@@ -13230,7 +13230,7 @@
       </p:sp>
       <p:sp>
         <p:nvSpPr>
-          <p:cNvPr id="22" name=""/>
+          <p:cNvPr id="22" name="Shape 22"/>
           <p:cNvSpPr/>
           <p:nvPr/>
         </p:nvSpPr>
@@ -13256,7 +13256,7 @@
       </p:sp>
       <p:sp>
         <p:nvSpPr>
-          <p:cNvPr id="23" name=""/>
+          <p:cNvPr id="23" name="Shape 23"/>
           <p:cNvSpPr txBox="1"/>
           <p:nvPr/>
         </p:nvSpPr>
@@ -13291,7 +13291,7 @@
       </p:sp>
       <p:sp>
         <p:nvSpPr>
-          <p:cNvPr id="24" name=""/>
+          <p:cNvPr id="24" name="Shape 24"/>
           <p:cNvSpPr txBox="1"/>
           <p:nvPr/>
         </p:nvSpPr>
@@ -13346,7 +13346,7 @@
       </p:sp>
       <p:sp>
         <p:nvSpPr>
-          <p:cNvPr id="25" name=""/>
+          <p:cNvPr id="25" name="Shape 25"/>
           <p:cNvSpPr/>
           <p:nvPr/>
         </p:nvSpPr>
@@ -13372,7 +13372,7 @@
       </p:sp>
       <p:sp>
         <p:nvSpPr>
-          <p:cNvPr id="26" name=""/>
+          <p:cNvPr id="26" name="Shape 26"/>
           <p:cNvSpPr txBox="1"/>
           <p:nvPr/>
         </p:nvSpPr>
@@ -13407,7 +13407,7 @@
       </p:sp>
       <p:sp>
         <p:nvSpPr>
-          <p:cNvPr id="27" name=""/>
+          <p:cNvPr id="27" name="Shape 27"/>
           <p:cNvSpPr txBox="1"/>
           <p:nvPr/>
         </p:nvSpPr>
@@ -13494,7 +13494,7 @@
       </p:sp>
       <p:sp>
         <p:nvSpPr>
-          <p:cNvPr id="28" name=""/>
+          <p:cNvPr id="28" name="Shape 28"/>
           <p:cNvSpPr/>
           <p:nvPr/>
         </p:nvSpPr>
@@ -13520,7 +13520,7 @@
       </p:sp>
       <p:sp>
         <p:nvSpPr>
-          <p:cNvPr id="29" name=""/>
+          <p:cNvPr id="29" name="Shape 29"/>
           <p:cNvSpPr txBox="1"/>
           <p:nvPr/>
         </p:nvSpPr>
@@ -13555,7 +13555,7 @@
       </p:sp>
       <p:sp>
         <p:nvSpPr>
-          <p:cNvPr id="30" name=""/>
+          <p:cNvPr id="30" name="Shape 30"/>
           <p:cNvSpPr txBox="1"/>
           <p:nvPr/>
         </p:nvSpPr>
@@ -13653,14 +13653,14 @@
   <p:cSld>
     <p:spTree>
       <p:nvGrpSpPr>
-        <p:cNvPr id="1" name=""/>
+        <p:cNvPr id="1" name="Shape 1"/>
         <p:cNvGrpSpPr/>
         <p:nvPr/>
       </p:nvGrpSpPr>
       <p:grpSpPr/>
       <p:sp>
         <p:nvSpPr>
-          <p:cNvPr id="2" name=""/>
+          <p:cNvPr id="2" name="Shape 2"/>
           <p:cNvSpPr/>
           <p:nvPr/>
         </p:nvSpPr>
@@ -13682,7 +13682,7 @@
       </p:sp>
       <p:sp>
         <p:nvSpPr>
-          <p:cNvPr id="3" name=""/>
+          <p:cNvPr id="3" name="Shape 3"/>
           <p:cNvSpPr/>
           <p:nvPr/>
         </p:nvSpPr>
@@ -13704,7 +13704,7 @@
       </p:sp>
       <p:sp>
         <p:nvSpPr>
-          <p:cNvPr id="4" name=""/>
+          <p:cNvPr id="4" name="Shape 4"/>
           <p:cNvSpPr txBox="1"/>
           <p:nvPr/>
         </p:nvSpPr>
@@ -13739,7 +13739,7 @@
       </p:sp>
       <p:sp>
         <p:nvSpPr>
-          <p:cNvPr id="5" name=""/>
+          <p:cNvPr id="5" name="Shape 5"/>
           <p:cNvSpPr txBox="1"/>
           <p:nvPr/>
         </p:nvSpPr>
@@ -13774,7 +13774,7 @@
       </p:sp>
       <p:pic>
         <p:nvPicPr>
-          <p:cNvPr id="6" name="" descr="logo_s.png"/>
+          <p:cNvPr id="6" name="Shape 6" descr="logo_s.png"/>
           <p:cNvPicPr>
             <a:picLocks noChangeAspect="1"/>
           </p:cNvPicPr>
@@ -13798,7 +13798,7 @@
       </p:pic>
       <p:sp>
         <p:nvSpPr>
-          <p:cNvPr id="7" name=""/>
+          <p:cNvPr id="7" name="Shape 7"/>
           <p:cNvSpPr/>
           <p:nvPr/>
         </p:nvSpPr>
@@ -13820,7 +13820,7 @@
       </p:sp>
       <p:sp>
         <p:nvSpPr>
-          <p:cNvPr id="8" name=""/>
+          <p:cNvPr id="8" name="Shape 8"/>
           <p:cNvSpPr txBox="1"/>
           <p:nvPr/>
         </p:nvSpPr>
@@ -13855,7 +13855,7 @@
       </p:sp>
       <p:sp>
         <p:nvSpPr>
-          <p:cNvPr id="9" name=""/>
+          <p:cNvPr id="9" name="Shape 9"/>
           <p:cNvSpPr txBox="1"/>
           <p:nvPr/>
         </p:nvSpPr>
@@ -13890,7 +13890,7 @@
       </p:sp>
       <p:sp>
         <p:nvSpPr>
-          <p:cNvPr id="10" name=""/>
+          <p:cNvPr id="10" name="Shape 10"/>
           <p:cNvSpPr/>
           <p:nvPr/>
         </p:nvSpPr>
@@ -13914,7 +13914,7 @@
       </p:sp>
       <p:sp>
         <p:nvSpPr>
-          <p:cNvPr id="11" name=""/>
+          <p:cNvPr id="11" name="Shape 11"/>
           <p:cNvSpPr txBox="1"/>
           <p:nvPr/>
         </p:nvSpPr>
@@ -13949,7 +13949,7 @@
       </p:sp>
       <p:sp>
         <p:nvSpPr>
-          <p:cNvPr id="12" name=""/>
+          <p:cNvPr id="12" name="Shape 12"/>
           <p:cNvSpPr txBox="1"/>
           <p:nvPr/>
         </p:nvSpPr>
@@ -13984,7 +13984,7 @@
       </p:sp>
       <p:sp>
         <p:nvSpPr>
-          <p:cNvPr id="13" name=""/>
+          <p:cNvPr id="13" name="Shape 13"/>
           <p:cNvSpPr txBox="1"/>
           <p:nvPr/>
         </p:nvSpPr>
@@ -14019,7 +14019,7 @@
       </p:sp>
       <p:sp>
         <p:nvSpPr>
-          <p:cNvPr id="14" name=""/>
+          <p:cNvPr id="14" name="Shape 14"/>
           <p:cNvSpPr/>
           <p:nvPr/>
         </p:nvSpPr>
@@ -14043,7 +14043,7 @@
       </p:sp>
       <p:sp>
         <p:nvSpPr>
-          <p:cNvPr id="15" name=""/>
+          <p:cNvPr id="15" name="Shape 15"/>
           <p:cNvSpPr txBox="1"/>
           <p:nvPr/>
         </p:nvSpPr>
@@ -14078,7 +14078,7 @@
       </p:sp>
       <p:sp>
         <p:nvSpPr>
-          <p:cNvPr id="16" name=""/>
+          <p:cNvPr id="16" name="Shape 16"/>
           <p:cNvSpPr txBox="1"/>
           <p:nvPr/>
         </p:nvSpPr>
@@ -14113,7 +14113,7 @@
       </p:sp>
       <p:sp>
         <p:nvSpPr>
-          <p:cNvPr id="17" name=""/>
+          <p:cNvPr id="17" name="Shape 17"/>
           <p:cNvSpPr txBox="1"/>
           <p:nvPr/>
         </p:nvSpPr>
@@ -14148,7 +14148,7 @@
       </p:sp>
       <p:sp>
         <p:nvSpPr>
-          <p:cNvPr id="18" name=""/>
+          <p:cNvPr id="18" name="Shape 18"/>
           <p:cNvSpPr/>
           <p:nvPr/>
         </p:nvSpPr>
@@ -14172,7 +14172,7 @@
       </p:sp>
       <p:sp>
         <p:nvSpPr>
-          <p:cNvPr id="19" name=""/>
+          <p:cNvPr id="19" name="Shape 19"/>
           <p:cNvSpPr txBox="1"/>
           <p:nvPr/>
         </p:nvSpPr>
@@ -14207,7 +14207,7 @@
       </p:sp>
       <p:sp>
         <p:nvSpPr>
-          <p:cNvPr id="20" name=""/>
+          <p:cNvPr id="20" name="Shape 20"/>
           <p:cNvSpPr txBox="1"/>
           <p:nvPr/>
         </p:nvSpPr>
@@ -14242,7 +14242,7 @@
       </p:sp>
       <p:sp>
         <p:nvSpPr>
-          <p:cNvPr id="21" name=""/>
+          <p:cNvPr id="21" name="Shape 21"/>
           <p:cNvSpPr txBox="1"/>
           <p:nvPr/>
         </p:nvSpPr>
@@ -14277,7 +14277,7 @@
       </p:sp>
       <p:sp>
         <p:nvSpPr>
-          <p:cNvPr id="22" name=""/>
+          <p:cNvPr id="22" name="Shape 22"/>
           <p:cNvSpPr/>
           <p:nvPr/>
         </p:nvSpPr>
@@ -14301,7 +14301,7 @@
       </p:sp>
       <p:sp>
         <p:nvSpPr>
-          <p:cNvPr id="23" name=""/>
+          <p:cNvPr id="23" name="Shape 23"/>
           <p:cNvSpPr txBox="1"/>
           <p:nvPr/>
         </p:nvSpPr>
@@ -14336,7 +14336,7 @@
       </p:sp>
       <p:sp>
         <p:nvSpPr>
-          <p:cNvPr id="24" name=""/>
+          <p:cNvPr id="24" name="Shape 24"/>
           <p:cNvSpPr txBox="1"/>
           <p:nvPr/>
         </p:nvSpPr>
@@ -14371,7 +14371,7 @@
       </p:sp>
       <p:sp>
         <p:nvSpPr>
-          <p:cNvPr id="25" name=""/>
+          <p:cNvPr id="25" name="Shape 25"/>
           <p:cNvSpPr txBox="1"/>
           <p:nvPr/>
         </p:nvSpPr>
@@ -14406,7 +14406,7 @@
       </p:sp>
       <p:sp>
         <p:nvSpPr>
-          <p:cNvPr id="26" name=""/>
+          <p:cNvPr id="26" name="Shape 26"/>
           <p:cNvSpPr/>
           <p:nvPr/>
         </p:nvSpPr>
@@ -14430,7 +14430,7 @@
       </p:sp>
       <p:sp>
         <p:nvSpPr>
-          <p:cNvPr id="27" name=""/>
+          <p:cNvPr id="27" name="Shape 27"/>
           <p:cNvSpPr txBox="1"/>
           <p:nvPr/>
         </p:nvSpPr>
@@ -14465,7 +14465,7 @@
       </p:sp>
       <p:sp>
         <p:nvSpPr>
-          <p:cNvPr id="28" name=""/>
+          <p:cNvPr id="28" name="Shape 28"/>
           <p:cNvSpPr txBox="1"/>
           <p:nvPr/>
         </p:nvSpPr>
@@ -14500,7 +14500,7 @@
       </p:sp>
       <p:sp>
         <p:nvSpPr>
-          <p:cNvPr id="29" name=""/>
+          <p:cNvPr id="29" name="Shape 29"/>
           <p:cNvSpPr txBox="1"/>
           <p:nvPr/>
         </p:nvSpPr>
@@ -14535,7 +14535,7 @@
       </p:sp>
       <p:sp>
         <p:nvSpPr>
-          <p:cNvPr id="30" name=""/>
+          <p:cNvPr id="30" name="Shape 30"/>
           <p:cNvSpPr/>
           <p:nvPr/>
         </p:nvSpPr>
@@ -14559,7 +14559,7 @@
       </p:sp>
       <p:sp>
         <p:nvSpPr>
-          <p:cNvPr id="31" name=""/>
+          <p:cNvPr id="31" name="Shape 31"/>
           <p:cNvSpPr txBox="1"/>
           <p:nvPr/>
         </p:nvSpPr>
@@ -14594,7 +14594,7 @@
       </p:sp>
       <p:sp>
         <p:nvSpPr>
-          <p:cNvPr id="32" name=""/>
+          <p:cNvPr id="32" name="Shape 32"/>
           <p:cNvSpPr txBox="1"/>
           <p:nvPr/>
         </p:nvSpPr>
@@ -14629,7 +14629,7 @@
       </p:sp>
       <p:sp>
         <p:nvSpPr>
-          <p:cNvPr id="33" name=""/>
+          <p:cNvPr id="33" name="Shape 33"/>
           <p:cNvSpPr txBox="1"/>
           <p:nvPr/>
         </p:nvSpPr>
@@ -14675,14 +14675,14 @@
   <p:cSld>
     <p:spTree>
       <p:nvGrpSpPr>
-        <p:cNvPr id="1" name=""/>
+        <p:cNvPr id="1" name="Shape 1"/>
         <p:cNvGrpSpPr/>
         <p:nvPr/>
       </p:nvGrpSpPr>
       <p:grpSpPr/>
       <p:sp>
         <p:nvSpPr>
-          <p:cNvPr id="2" name=""/>
+          <p:cNvPr id="2" name="Shape 2"/>
           <p:cNvSpPr/>
           <p:nvPr/>
         </p:nvSpPr>
@@ -14704,7 +14704,7 @@
       </p:sp>
       <p:sp>
         <p:nvSpPr>
-          <p:cNvPr id="3" name=""/>
+          <p:cNvPr id="3" name="Shape 3"/>
           <p:cNvSpPr/>
           <p:nvPr/>
         </p:nvSpPr>
@@ -14726,7 +14726,7 @@
       </p:sp>
       <p:sp>
         <p:nvSpPr>
-          <p:cNvPr id="4" name=""/>
+          <p:cNvPr id="4" name="Shape 4"/>
           <p:cNvSpPr txBox="1"/>
           <p:nvPr/>
         </p:nvSpPr>
@@ -14761,7 +14761,7 @@
       </p:sp>
       <p:sp>
         <p:nvSpPr>
-          <p:cNvPr id="5" name=""/>
+          <p:cNvPr id="5" name="Shape 5"/>
           <p:cNvSpPr txBox="1"/>
           <p:nvPr/>
         </p:nvSpPr>
@@ -14796,7 +14796,7 @@
       </p:sp>
       <p:pic>
         <p:nvPicPr>
-          <p:cNvPr id="6" name="" descr="logo_s.png"/>
+          <p:cNvPr id="6" name="Shape 6" descr="logo_s.png"/>
           <p:cNvPicPr>
             <a:picLocks noChangeAspect="1"/>
           </p:cNvPicPr>
@@ -14820,7 +14820,7 @@
       </p:pic>
       <p:sp>
         <p:nvSpPr>
-          <p:cNvPr id="7" name=""/>
+          <p:cNvPr id="7" name="Shape 7"/>
           <p:cNvSpPr/>
           <p:nvPr/>
         </p:nvSpPr>
@@ -14842,7 +14842,7 @@
       </p:sp>
       <p:sp>
         <p:nvSpPr>
-          <p:cNvPr id="8" name=""/>
+          <p:cNvPr id="8" name="Shape 8"/>
           <p:cNvSpPr txBox="1"/>
           <p:nvPr/>
         </p:nvSpPr>
@@ -14877,7 +14877,7 @@
       </p:sp>
       <p:sp>
         <p:nvSpPr>
-          <p:cNvPr id="9" name=""/>
+          <p:cNvPr id="9" name="Shape 9"/>
           <p:cNvSpPr txBox="1"/>
           <p:nvPr/>
         </p:nvSpPr>
@@ -14912,7 +14912,7 @@
       </p:sp>
       <p:graphicFrame>
         <p:nvGraphicFramePr>
-          <p:cNvPr id="10" name=""/>
+          <p:cNvPr id="10" name="Shape 10"/>
           <p:cNvGraphicFramePr>
             <a:graphicFrameLocks noGrp="1"/>
           </p:cNvGraphicFramePr>
@@ -15921,7 +15921,7 @@
       </p:graphicFrame>
       <p:sp>
         <p:nvSpPr>
-          <p:cNvPr id="11" name=""/>
+          <p:cNvPr id="11" name="Shape 11"/>
           <p:cNvSpPr/>
           <p:nvPr/>
         </p:nvSpPr>
@@ -15947,7 +15947,7 @@
       </p:sp>
       <p:sp>
         <p:nvSpPr>
-          <p:cNvPr id="12" name=""/>
+          <p:cNvPr id="12" name="Shape 12"/>
           <p:cNvSpPr txBox="1"/>
           <p:nvPr/>
         </p:nvSpPr>
@@ -15982,7 +15982,7 @@
       </p:sp>
       <p:sp>
         <p:nvSpPr>
-          <p:cNvPr id="13" name=""/>
+          <p:cNvPr id="13" name="Shape 13"/>
           <p:cNvSpPr txBox="1"/>
           <p:nvPr/>
         </p:nvSpPr>
@@ -16037,7 +16037,7 @@
       </p:sp>
       <p:sp>
         <p:nvSpPr>
-          <p:cNvPr id="14" name=""/>
+          <p:cNvPr id="14" name="Shape 14"/>
           <p:cNvSpPr/>
           <p:nvPr/>
         </p:nvSpPr>
@@ -16063,7 +16063,7 @@
       </p:sp>
       <p:sp>
         <p:nvSpPr>
-          <p:cNvPr id="15" name=""/>
+          <p:cNvPr id="15" name="Shape 15"/>
           <p:cNvSpPr txBox="1"/>
           <p:nvPr/>
         </p:nvSpPr>
@@ -16098,7 +16098,7 @@
       </p:sp>
       <p:sp>
         <p:nvSpPr>
-          <p:cNvPr id="16" name=""/>
+          <p:cNvPr id="16" name="Shape 16"/>
           <p:cNvSpPr txBox="1"/>
           <p:nvPr/>
         </p:nvSpPr>
@@ -16164,14 +16164,14 @@
   <p:cSld>
     <p:spTree>
       <p:nvGrpSpPr>
-        <p:cNvPr id="1" name=""/>
+        <p:cNvPr id="1" name="Shape 1"/>
         <p:cNvGrpSpPr/>
         <p:nvPr/>
       </p:nvGrpSpPr>
       <p:grpSpPr/>
       <p:sp>
         <p:nvSpPr>
-          <p:cNvPr id="2" name=""/>
+          <p:cNvPr id="2" name="Shape 2"/>
           <p:cNvSpPr/>
           <p:nvPr/>
         </p:nvSpPr>
@@ -16193,7 +16193,7 @@
       </p:sp>
       <p:sp>
         <p:nvSpPr>
-          <p:cNvPr id="3" name=""/>
+          <p:cNvPr id="3" name="Shape 3"/>
           <p:cNvSpPr/>
           <p:nvPr/>
         </p:nvSpPr>
@@ -16215,7 +16215,7 @@
       </p:sp>
       <p:sp>
         <p:nvSpPr>
-          <p:cNvPr id="4" name=""/>
+          <p:cNvPr id="4" name="Shape 4"/>
           <p:cNvSpPr txBox="1"/>
           <p:nvPr/>
         </p:nvSpPr>
@@ -16250,7 +16250,7 @@
       </p:sp>
       <p:sp>
         <p:nvSpPr>
-          <p:cNvPr id="5" name=""/>
+          <p:cNvPr id="5" name="Shape 5"/>
           <p:cNvSpPr txBox="1"/>
           <p:nvPr/>
         </p:nvSpPr>
@@ -16285,7 +16285,7 @@
       </p:sp>
       <p:pic>
         <p:nvPicPr>
-          <p:cNvPr id="6" name="" descr="logo_s.png"/>
+          <p:cNvPr id="6" name="Shape 6" descr="logo_s.png"/>
           <p:cNvPicPr>
             <a:picLocks noChangeAspect="1"/>
           </p:cNvPicPr>
@@ -16309,7 +16309,7 @@
       </p:pic>
       <p:sp>
         <p:nvSpPr>
-          <p:cNvPr id="7" name=""/>
+          <p:cNvPr id="7" name="Shape 7"/>
           <p:cNvSpPr/>
           <p:nvPr/>
         </p:nvSpPr>
@@ -16331,7 +16331,7 @@
       </p:sp>
       <p:sp>
         <p:nvSpPr>
-          <p:cNvPr id="8" name=""/>
+          <p:cNvPr id="8" name="Shape 8"/>
           <p:cNvSpPr txBox="1"/>
           <p:nvPr/>
         </p:nvSpPr>
@@ -16366,7 +16366,7 @@
       </p:sp>
       <p:sp>
         <p:nvSpPr>
-          <p:cNvPr id="9" name=""/>
+          <p:cNvPr id="9" name="Shape 9"/>
           <p:cNvSpPr txBox="1"/>
           <p:nvPr/>
         </p:nvSpPr>
@@ -16401,7 +16401,7 @@
       </p:sp>
       <p:sp>
         <p:nvSpPr>
-          <p:cNvPr id="10" name=""/>
+          <p:cNvPr id="10" name="Shape 10"/>
           <p:cNvSpPr/>
           <p:nvPr/>
         </p:nvSpPr>
@@ -16425,7 +16425,7 @@
       </p:sp>
       <p:sp>
         <p:nvSpPr>
-          <p:cNvPr id="11" name=""/>
+          <p:cNvPr id="11" name="Shape 11"/>
           <p:cNvSpPr txBox="1"/>
           <p:nvPr/>
         </p:nvSpPr>
@@ -16460,7 +16460,7 @@
       </p:sp>
       <p:sp>
         <p:nvSpPr>
-          <p:cNvPr id="12" name=""/>
+          <p:cNvPr id="12" name="Shape 12"/>
           <p:cNvSpPr txBox="1"/>
           <p:nvPr/>
         </p:nvSpPr>
@@ -16495,7 +16495,7 @@
       </p:sp>
       <p:sp>
         <p:nvSpPr>
-          <p:cNvPr id="13" name=""/>
+          <p:cNvPr id="13" name="Shape 13"/>
           <p:cNvSpPr txBox="1"/>
           <p:nvPr/>
         </p:nvSpPr>
@@ -16530,7 +16530,7 @@
       </p:sp>
       <p:sp>
         <p:nvSpPr>
-          <p:cNvPr id="14" name=""/>
+          <p:cNvPr id="14" name="Shape 14"/>
           <p:cNvSpPr/>
           <p:nvPr/>
         </p:nvSpPr>
@@ -16554,7 +16554,7 @@
       </p:sp>
       <p:sp>
         <p:nvSpPr>
-          <p:cNvPr id="15" name=""/>
+          <p:cNvPr id="15" name="Shape 15"/>
           <p:cNvSpPr txBox="1"/>
           <p:nvPr/>
         </p:nvSpPr>
@@ -16589,7 +16589,7 @@
       </p:sp>
       <p:sp>
         <p:nvSpPr>
-          <p:cNvPr id="16" name=""/>
+          <p:cNvPr id="16" name="Shape 16"/>
           <p:cNvSpPr txBox="1"/>
           <p:nvPr/>
         </p:nvSpPr>
@@ -16624,7 +16624,7 @@
       </p:sp>
       <p:sp>
         <p:nvSpPr>
-          <p:cNvPr id="17" name=""/>
+          <p:cNvPr id="17" name="Shape 17"/>
           <p:cNvSpPr txBox="1"/>
           <p:nvPr/>
         </p:nvSpPr>
@@ -16659,7 +16659,7 @@
       </p:sp>
       <p:sp>
         <p:nvSpPr>
-          <p:cNvPr id="18" name=""/>
+          <p:cNvPr id="18" name="Shape 18"/>
           <p:cNvSpPr/>
           <p:nvPr/>
         </p:nvSpPr>
@@ -16683,7 +16683,7 @@
       </p:sp>
       <p:sp>
         <p:nvSpPr>
-          <p:cNvPr id="19" name=""/>
+          <p:cNvPr id="19" name="Shape 19"/>
           <p:cNvSpPr txBox="1"/>
           <p:nvPr/>
         </p:nvSpPr>
@@ -16718,7 +16718,7 @@
       </p:sp>
       <p:sp>
         <p:nvSpPr>
-          <p:cNvPr id="20" name=""/>
+          <p:cNvPr id="20" name="Shape 20"/>
           <p:cNvSpPr txBox="1"/>
           <p:nvPr/>
         </p:nvSpPr>
@@ -16753,7 +16753,7 @@
       </p:sp>
       <p:sp>
         <p:nvSpPr>
-          <p:cNvPr id="21" name=""/>
+          <p:cNvPr id="21" name="Shape 21"/>
           <p:cNvSpPr txBox="1"/>
           <p:nvPr/>
         </p:nvSpPr>
@@ -16788,7 +16788,7 @@
       </p:sp>
       <p:sp>
         <p:nvSpPr>
-          <p:cNvPr id="22" name=""/>
+          <p:cNvPr id="22" name="Shape 22"/>
           <p:cNvSpPr/>
           <p:nvPr/>
         </p:nvSpPr>
@@ -16812,7 +16812,7 @@
       </p:sp>
       <p:sp>
         <p:nvSpPr>
-          <p:cNvPr id="23" name=""/>
+          <p:cNvPr id="23" name="Shape 23"/>
           <p:cNvSpPr txBox="1"/>
           <p:nvPr/>
         </p:nvSpPr>
@@ -16847,7 +16847,7 @@
       </p:sp>
       <p:sp>
         <p:nvSpPr>
-          <p:cNvPr id="24" name=""/>
+          <p:cNvPr id="24" name="Shape 24"/>
           <p:cNvSpPr txBox="1"/>
           <p:nvPr/>
         </p:nvSpPr>
@@ -16882,7 +16882,7 @@
       </p:sp>
       <p:sp>
         <p:nvSpPr>
-          <p:cNvPr id="25" name=""/>
+          <p:cNvPr id="25" name="Shape 25"/>
           <p:cNvSpPr txBox="1"/>
           <p:nvPr/>
         </p:nvSpPr>
@@ -16917,7 +16917,7 @@
       </p:sp>
       <p:sp>
         <p:nvSpPr>
-          <p:cNvPr id="26" name=""/>
+          <p:cNvPr id="26" name="Shape 26"/>
           <p:cNvSpPr/>
           <p:nvPr/>
         </p:nvSpPr>
@@ -16939,7 +16939,7 @@
       </p:sp>
       <p:sp>
         <p:nvSpPr>
-          <p:cNvPr id="27" name=""/>
+          <p:cNvPr id="27" name="Shape 27"/>
           <p:cNvSpPr txBox="1"/>
           <p:nvPr/>
         </p:nvSpPr>
@@ -16974,7 +16974,7 @@
       </p:sp>
       <p:sp>
         <p:nvSpPr>
-          <p:cNvPr id="28" name=""/>
+          <p:cNvPr id="28" name="Shape 28"/>
           <p:cNvSpPr txBox="1"/>
           <p:nvPr/>
         </p:nvSpPr>
@@ -17009,7 +17009,7 @@
       </p:sp>
       <p:sp>
         <p:nvSpPr>
-          <p:cNvPr id="29" name=""/>
+          <p:cNvPr id="29" name="Shape 29"/>
           <p:cNvSpPr/>
           <p:nvPr/>
         </p:nvSpPr>
@@ -17031,7 +17031,7 @@
       </p:sp>
       <p:sp>
         <p:nvSpPr>
-          <p:cNvPr id="30" name=""/>
+          <p:cNvPr id="30" name="Shape 30"/>
           <p:cNvSpPr txBox="1"/>
           <p:nvPr/>
         </p:nvSpPr>
@@ -17066,7 +17066,7 @@
       </p:sp>
       <p:sp>
         <p:nvSpPr>
-          <p:cNvPr id="31" name=""/>
+          <p:cNvPr id="31" name="Shape 31"/>
           <p:cNvSpPr txBox="1"/>
           <p:nvPr/>
         </p:nvSpPr>
@@ -17101,7 +17101,7 @@
       </p:sp>
       <p:sp>
         <p:nvSpPr>
-          <p:cNvPr id="32" name=""/>
+          <p:cNvPr id="32" name="Shape 32"/>
           <p:cNvSpPr/>
           <p:nvPr/>
         </p:nvSpPr>
@@ -17123,7 +17123,7 @@
       </p:sp>
       <p:sp>
         <p:nvSpPr>
-          <p:cNvPr id="33" name=""/>
+          <p:cNvPr id="33" name="Shape 33"/>
           <p:cNvSpPr txBox="1"/>
           <p:nvPr/>
         </p:nvSpPr>
@@ -17158,7 +17158,7 @@
       </p:sp>
       <p:sp>
         <p:nvSpPr>
-          <p:cNvPr id="34" name=""/>
+          <p:cNvPr id="34" name="Shape 34"/>
           <p:cNvSpPr txBox="1"/>
           <p:nvPr/>
         </p:nvSpPr>
@@ -17193,7 +17193,7 @@
       </p:sp>
       <p:sp>
         <p:nvSpPr>
-          <p:cNvPr id="35" name=""/>
+          <p:cNvPr id="35" name="Shape 35"/>
           <p:cNvSpPr/>
           <p:nvPr/>
         </p:nvSpPr>
@@ -17215,7 +17215,7 @@
       </p:sp>
       <p:sp>
         <p:nvSpPr>
-          <p:cNvPr id="36" name=""/>
+          <p:cNvPr id="36" name="Shape 36"/>
           <p:cNvSpPr txBox="1"/>
           <p:nvPr/>
         </p:nvSpPr>
@@ -17250,7 +17250,7 @@
       </p:sp>
       <p:sp>
         <p:nvSpPr>
-          <p:cNvPr id="37" name=""/>
+          <p:cNvPr id="37" name="Shape 37"/>
           <p:cNvSpPr txBox="1"/>
           <p:nvPr/>
         </p:nvSpPr>
@@ -17285,7 +17285,7 @@
       </p:sp>
       <p:sp>
         <p:nvSpPr>
-          <p:cNvPr id="38" name=""/>
+          <p:cNvPr id="38" name="Shape 38"/>
           <p:cNvSpPr/>
           <p:nvPr/>
         </p:nvSpPr>
@@ -17307,7 +17307,7 @@
       </p:sp>
       <p:sp>
         <p:nvSpPr>
-          <p:cNvPr id="39" name=""/>
+          <p:cNvPr id="39" name="Shape 39"/>
           <p:cNvSpPr/>
           <p:nvPr/>
         </p:nvSpPr>
@@ -17333,7 +17333,7 @@
       </p:sp>
       <p:sp>
         <p:nvSpPr>
-          <p:cNvPr id="40" name=""/>
+          <p:cNvPr id="40" name="Shape 40"/>
           <p:cNvSpPr txBox="1"/>
           <p:nvPr/>
         </p:nvSpPr>
@@ -17368,7 +17368,7 @@
       </p:sp>
       <p:sp>
         <p:nvSpPr>
-          <p:cNvPr id="41" name=""/>
+          <p:cNvPr id="41" name="Shape 41"/>
           <p:cNvSpPr txBox="1"/>
           <p:nvPr/>
         </p:nvSpPr>
@@ -17407,7 +17407,7 @@
       </p:sp>
       <p:sp>
         <p:nvSpPr>
-          <p:cNvPr id="42" name=""/>
+          <p:cNvPr id="42" name="Shape 42"/>
           <p:cNvSpPr/>
           <p:nvPr/>
         </p:nvSpPr>
@@ -17431,7 +17431,7 @@
       </p:sp>
       <p:sp>
         <p:nvSpPr>
-          <p:cNvPr id="43" name=""/>
+          <p:cNvPr id="43" name="Shape 43"/>
           <p:cNvSpPr txBox="1"/>
           <p:nvPr/>
         </p:nvSpPr>
@@ -17466,7 +17466,7 @@
       </p:sp>
       <p:sp>
         <p:nvSpPr>
-          <p:cNvPr id="44" name=""/>
+          <p:cNvPr id="44" name="Shape 44"/>
           <p:cNvSpPr txBox="1"/>
           <p:nvPr/>
         </p:nvSpPr>
@@ -17512,14 +17512,14 @@
   <p:cSld>
     <p:spTree>
       <p:nvGrpSpPr>
-        <p:cNvPr id="1" name=""/>
+        <p:cNvPr id="1" name="Shape 1"/>
         <p:cNvGrpSpPr/>
         <p:nvPr/>
       </p:nvGrpSpPr>
       <p:grpSpPr/>
       <p:sp>
         <p:nvSpPr>
-          <p:cNvPr id="2" name=""/>
+          <p:cNvPr id="2" name="Shape 2"/>
           <p:cNvSpPr/>
           <p:nvPr/>
         </p:nvSpPr>
@@ -17541,7 +17541,7 @@
       </p:sp>
       <p:sp>
         <p:nvSpPr>
-          <p:cNvPr id="3" name=""/>
+          <p:cNvPr id="3" name="Shape 3"/>
           <p:cNvSpPr/>
           <p:nvPr/>
         </p:nvSpPr>
@@ -17563,7 +17563,7 @@
       </p:sp>
       <p:sp>
         <p:nvSpPr>
-          <p:cNvPr id="4" name=""/>
+          <p:cNvPr id="4" name="Shape 4"/>
           <p:cNvSpPr txBox="1"/>
           <p:nvPr/>
         </p:nvSpPr>
@@ -17598,7 +17598,7 @@
       </p:sp>
       <p:sp>
         <p:nvSpPr>
-          <p:cNvPr id="5" name=""/>
+          <p:cNvPr id="5" name="Shape 5"/>
           <p:cNvSpPr txBox="1"/>
           <p:nvPr/>
         </p:nvSpPr>
@@ -17633,7 +17633,7 @@
       </p:sp>
       <p:pic>
         <p:nvPicPr>
-          <p:cNvPr id="6" name="" descr="logo_s.png"/>
+          <p:cNvPr id="6" name="Shape 6" descr="logo_s.png"/>
           <p:cNvPicPr>
             <a:picLocks noChangeAspect="1"/>
           </p:cNvPicPr>
@@ -17657,7 +17657,7 @@
       </p:pic>
       <p:sp>
         <p:nvSpPr>
-          <p:cNvPr id="7" name=""/>
+          <p:cNvPr id="7" name="Shape 7"/>
           <p:cNvSpPr/>
           <p:nvPr/>
         </p:nvSpPr>
@@ -17679,7 +17679,7 @@
       </p:sp>
       <p:sp>
         <p:nvSpPr>
-          <p:cNvPr id="8" name=""/>
+          <p:cNvPr id="8" name="Shape 8"/>
           <p:cNvSpPr txBox="1"/>
           <p:nvPr/>
         </p:nvSpPr>
@@ -17714,7 +17714,7 @@
       </p:sp>
       <p:sp>
         <p:nvSpPr>
-          <p:cNvPr id="9" name=""/>
+          <p:cNvPr id="9" name="Shape 9"/>
           <p:cNvSpPr txBox="1"/>
           <p:nvPr/>
         </p:nvSpPr>
@@ -17749,7 +17749,7 @@
       </p:sp>
       <p:sp>
         <p:nvSpPr>
-          <p:cNvPr id="10" name=""/>
+          <p:cNvPr id="10" name="Shape 10"/>
           <p:cNvSpPr/>
           <p:nvPr/>
         </p:nvSpPr>
@@ -17773,7 +17773,7 @@
       </p:sp>
       <p:sp>
         <p:nvSpPr>
-          <p:cNvPr id="11" name=""/>
+          <p:cNvPr id="11" name="Shape 11"/>
           <p:cNvSpPr txBox="1"/>
           <p:nvPr/>
         </p:nvSpPr>
@@ -17808,7 +17808,7 @@
       </p:sp>
       <p:sp>
         <p:nvSpPr>
-          <p:cNvPr id="12" name=""/>
+          <p:cNvPr id="12" name="Shape 12"/>
           <p:cNvSpPr txBox="1"/>
           <p:nvPr/>
         </p:nvSpPr>
@@ -17843,7 +17843,7 @@
       </p:sp>
       <p:sp>
         <p:nvSpPr>
-          <p:cNvPr id="13" name=""/>
+          <p:cNvPr id="13" name="Shape 13"/>
           <p:cNvSpPr txBox="1"/>
           <p:nvPr/>
         </p:nvSpPr>
@@ -17878,7 +17878,7 @@
       </p:sp>
       <p:sp>
         <p:nvSpPr>
-          <p:cNvPr id="14" name=""/>
+          <p:cNvPr id="14" name="Shape 14"/>
           <p:cNvSpPr/>
           <p:nvPr/>
         </p:nvSpPr>
@@ -17902,7 +17902,7 @@
       </p:sp>
       <p:sp>
         <p:nvSpPr>
-          <p:cNvPr id="15" name=""/>
+          <p:cNvPr id="15" name="Shape 15"/>
           <p:cNvSpPr txBox="1"/>
           <p:nvPr/>
         </p:nvSpPr>
@@ -17937,7 +17937,7 @@
       </p:sp>
       <p:sp>
         <p:nvSpPr>
-          <p:cNvPr id="16" name=""/>
+          <p:cNvPr id="16" name="Shape 16"/>
           <p:cNvSpPr txBox="1"/>
           <p:nvPr/>
         </p:nvSpPr>
@@ -17972,7 +17972,7 @@
       </p:sp>
       <p:sp>
         <p:nvSpPr>
-          <p:cNvPr id="17" name=""/>
+          <p:cNvPr id="17" name="Shape 17"/>
           <p:cNvSpPr txBox="1"/>
           <p:nvPr/>
         </p:nvSpPr>
@@ -18007,7 +18007,7 @@
       </p:sp>
       <p:sp>
         <p:nvSpPr>
-          <p:cNvPr id="18" name=""/>
+          <p:cNvPr id="18" name="Shape 18"/>
           <p:cNvSpPr/>
           <p:nvPr/>
         </p:nvSpPr>
@@ -18031,7 +18031,7 @@
       </p:sp>
       <p:sp>
         <p:nvSpPr>
-          <p:cNvPr id="19" name=""/>
+          <p:cNvPr id="19" name="Shape 19"/>
           <p:cNvSpPr txBox="1"/>
           <p:nvPr/>
         </p:nvSpPr>
@@ -18066,7 +18066,7 @@
       </p:sp>
       <p:sp>
         <p:nvSpPr>
-          <p:cNvPr id="20" name=""/>
+          <p:cNvPr id="20" name="Shape 20"/>
           <p:cNvSpPr txBox="1"/>
           <p:nvPr/>
         </p:nvSpPr>
@@ -18101,7 +18101,7 @@
       </p:sp>
       <p:sp>
         <p:nvSpPr>
-          <p:cNvPr id="21" name=""/>
+          <p:cNvPr id="21" name="Shape 21"/>
           <p:cNvSpPr txBox="1"/>
           <p:nvPr/>
         </p:nvSpPr>
@@ -18136,7 +18136,7 @@
       </p:sp>
       <p:sp>
         <p:nvSpPr>
-          <p:cNvPr id="22" name=""/>
+          <p:cNvPr id="22" name="Shape 22"/>
           <p:cNvSpPr/>
           <p:nvPr/>
         </p:nvSpPr>
@@ -18160,7 +18160,7 @@
       </p:sp>
       <p:sp>
         <p:nvSpPr>
-          <p:cNvPr id="23" name=""/>
+          <p:cNvPr id="23" name="Shape 23"/>
           <p:cNvSpPr txBox="1"/>
           <p:nvPr/>
         </p:nvSpPr>
@@ -18195,7 +18195,7 @@
       </p:sp>
       <p:sp>
         <p:nvSpPr>
-          <p:cNvPr id="24" name=""/>
+          <p:cNvPr id="24" name="Shape 24"/>
           <p:cNvSpPr txBox="1"/>
           <p:nvPr/>
         </p:nvSpPr>
@@ -18230,7 +18230,7 @@
       </p:sp>
       <p:sp>
         <p:nvSpPr>
-          <p:cNvPr id="25" name=""/>
+          <p:cNvPr id="25" name="Shape 25"/>
           <p:cNvSpPr txBox="1"/>
           <p:nvPr/>
         </p:nvSpPr>
@@ -18265,7 +18265,7 @@
       </p:sp>
       <p:sp>
         <p:nvSpPr>
-          <p:cNvPr id="26" name=""/>
+          <p:cNvPr id="26" name="Shape 26"/>
           <p:cNvSpPr/>
           <p:nvPr/>
         </p:nvSpPr>
@@ -18291,7 +18291,7 @@
       </p:sp>
       <p:sp>
         <p:nvSpPr>
-          <p:cNvPr id="27" name=""/>
+          <p:cNvPr id="27" name="Shape 27"/>
           <p:cNvSpPr txBox="1"/>
           <p:nvPr/>
         </p:nvSpPr>
@@ -18326,7 +18326,7 @@
       </p:sp>
       <p:sp>
         <p:nvSpPr>
-          <p:cNvPr id="28" name=""/>
+          <p:cNvPr id="28" name="Shape 28"/>
           <p:cNvSpPr txBox="1"/>
           <p:nvPr/>
         </p:nvSpPr>
@@ -18381,7 +18381,7 @@
       </p:sp>
       <p:sp>
         <p:nvSpPr>
-          <p:cNvPr id="29" name=""/>
+          <p:cNvPr id="29" name="Shape 29"/>
           <p:cNvSpPr/>
           <p:nvPr/>
         </p:nvSpPr>
@@ -18407,7 +18407,7 @@
       </p:sp>
       <p:sp>
         <p:nvSpPr>
-          <p:cNvPr id="30" name=""/>
+          <p:cNvPr id="30" name="Shape 30"/>
           <p:cNvSpPr txBox="1"/>
           <p:nvPr/>
         </p:nvSpPr>
@@ -18442,7 +18442,7 @@
       </p:sp>
       <p:sp>
         <p:nvSpPr>
-          <p:cNvPr id="31" name=""/>
+          <p:cNvPr id="31" name="Shape 31"/>
           <p:cNvSpPr txBox="1"/>
           <p:nvPr/>
         </p:nvSpPr>
@@ -18497,7 +18497,7 @@
       </p:sp>
       <p:sp>
         <p:nvSpPr>
-          <p:cNvPr id="32" name=""/>
+          <p:cNvPr id="32" name="Shape 32"/>
           <p:cNvSpPr/>
           <p:nvPr/>
         </p:nvSpPr>
@@ -18523,7 +18523,7 @@
       </p:sp>
       <p:sp>
         <p:nvSpPr>
-          <p:cNvPr id="33" name=""/>
+          <p:cNvPr id="33" name="Shape 33"/>
           <p:cNvSpPr txBox="1"/>
           <p:nvPr/>
         </p:nvSpPr>
@@ -18558,7 +18558,7 @@
       </p:sp>
       <p:sp>
         <p:nvSpPr>
-          <p:cNvPr id="34" name=""/>
+          <p:cNvPr id="34" name="Shape 34"/>
           <p:cNvSpPr txBox="1"/>
           <p:nvPr/>
         </p:nvSpPr>
@@ -18640,14 +18640,14 @@
   <p:cSld>
     <p:spTree>
       <p:nvGrpSpPr>
-        <p:cNvPr id="1" name=""/>
+        <p:cNvPr id="1" name="Shape 1"/>
         <p:cNvGrpSpPr/>
         <p:nvPr/>
       </p:nvGrpSpPr>
       <p:grpSpPr/>
       <p:sp>
         <p:nvSpPr>
-          <p:cNvPr id="2" name=""/>
+          <p:cNvPr id="2" name="Shape 2"/>
           <p:cNvSpPr/>
           <p:nvPr/>
         </p:nvSpPr>
@@ -18669,7 +18669,7 @@
       </p:sp>
       <p:sp>
         <p:nvSpPr>
-          <p:cNvPr id="3" name=""/>
+          <p:cNvPr id="3" name="Shape 3"/>
           <p:cNvSpPr/>
           <p:nvPr/>
         </p:nvSpPr>
@@ -18691,7 +18691,7 @@
       </p:sp>
       <p:sp>
         <p:nvSpPr>
-          <p:cNvPr id="4" name=""/>
+          <p:cNvPr id="4" name="Shape 4"/>
           <p:cNvSpPr txBox="1"/>
           <p:nvPr/>
         </p:nvSpPr>
@@ -18726,7 +18726,7 @@
       </p:sp>
       <p:sp>
         <p:nvSpPr>
-          <p:cNvPr id="5" name=""/>
+          <p:cNvPr id="5" name="Shape 5"/>
           <p:cNvSpPr txBox="1"/>
           <p:nvPr/>
         </p:nvSpPr>
@@ -18761,7 +18761,7 @@
       </p:sp>
       <p:pic>
         <p:nvPicPr>
-          <p:cNvPr id="6" name="" descr="logo_s.png"/>
+          <p:cNvPr id="6" name="Shape 6" descr="logo_s.png"/>
           <p:cNvPicPr>
             <a:picLocks noChangeAspect="1"/>
           </p:cNvPicPr>
@@ -18785,7 +18785,7 @@
       </p:pic>
       <p:sp>
         <p:nvSpPr>
-          <p:cNvPr id="7" name=""/>
+          <p:cNvPr id="7" name="Shape 7"/>
           <p:cNvSpPr/>
           <p:nvPr/>
         </p:nvSpPr>
@@ -18807,7 +18807,7 @@
       </p:sp>
       <p:sp>
         <p:nvSpPr>
-          <p:cNvPr id="8" name=""/>
+          <p:cNvPr id="8" name="Shape 8"/>
           <p:cNvSpPr txBox="1"/>
           <p:nvPr/>
         </p:nvSpPr>
@@ -18842,7 +18842,7 @@
       </p:sp>
       <p:sp>
         <p:nvSpPr>
-          <p:cNvPr id="9" name=""/>
+          <p:cNvPr id="9" name="Shape 9"/>
           <p:cNvSpPr txBox="1"/>
           <p:nvPr/>
         </p:nvSpPr>
@@ -18877,7 +18877,7 @@
       </p:sp>
       <p:graphicFrame>
         <p:nvGraphicFramePr>
-          <p:cNvPr id="10" name=""/>
+          <p:cNvPr id="10" name="Shape 10"/>
           <p:cNvGraphicFramePr>
             <a:graphicFrameLocks noGrp="1"/>
           </p:cNvGraphicFramePr>
@@ -20027,7 +20027,7 @@
       </p:graphicFrame>
       <p:sp>
         <p:nvSpPr>
-          <p:cNvPr id="11" name=""/>
+          <p:cNvPr id="11" name="Shape 11"/>
           <p:cNvSpPr/>
           <p:nvPr/>
         </p:nvSpPr>
@@ -20053,7 +20053,7 @@
       </p:sp>
       <p:sp>
         <p:nvSpPr>
-          <p:cNvPr id="12" name=""/>
+          <p:cNvPr id="12" name="Shape 12"/>
           <p:cNvSpPr txBox="1"/>
           <p:nvPr/>
         </p:nvSpPr>
@@ -20088,7 +20088,7 @@
       </p:sp>
       <p:sp>
         <p:nvSpPr>
-          <p:cNvPr id="13" name=""/>
+          <p:cNvPr id="13" name="Shape 13"/>
           <p:cNvSpPr txBox="1"/>
           <p:nvPr/>
         </p:nvSpPr>
@@ -20143,7 +20143,7 @@
       </p:sp>
       <p:sp>
         <p:nvSpPr>
-          <p:cNvPr id="14" name=""/>
+          <p:cNvPr id="14" name="Shape 14"/>
           <p:cNvSpPr/>
           <p:nvPr/>
         </p:nvSpPr>
@@ -20169,7 +20169,7 @@
       </p:sp>
       <p:sp>
         <p:nvSpPr>
-          <p:cNvPr id="15" name=""/>
+          <p:cNvPr id="15" name="Shape 15"/>
           <p:cNvSpPr txBox="1"/>
           <p:nvPr/>
         </p:nvSpPr>
@@ -20204,7 +20204,7 @@
       </p:sp>
       <p:sp>
         <p:nvSpPr>
-          <p:cNvPr id="16" name=""/>
+          <p:cNvPr id="16" name="Shape 16"/>
           <p:cNvSpPr txBox="1"/>
           <p:nvPr/>
         </p:nvSpPr>
@@ -20270,14 +20270,14 @@
   <p:cSld>
     <p:spTree>
       <p:nvGrpSpPr>
-        <p:cNvPr id="1" name=""/>
+        <p:cNvPr id="1" name="Shape 1"/>
         <p:cNvGrpSpPr/>
         <p:nvPr/>
       </p:nvGrpSpPr>
       <p:grpSpPr/>
       <p:sp>
         <p:nvSpPr>
-          <p:cNvPr id="2" name=""/>
+          <p:cNvPr id="2" name="Shape 2"/>
           <p:cNvSpPr/>
           <p:nvPr/>
         </p:nvSpPr>
@@ -20299,7 +20299,7 @@
       </p:sp>
       <p:sp>
         <p:nvSpPr>
-          <p:cNvPr id="3" name=""/>
+          <p:cNvPr id="3" name="Shape 3"/>
           <p:cNvSpPr/>
           <p:nvPr/>
         </p:nvSpPr>
@@ -20321,7 +20321,7 @@
       </p:sp>
       <p:sp>
         <p:nvSpPr>
-          <p:cNvPr id="4" name=""/>
+          <p:cNvPr id="4" name="Shape 4"/>
           <p:cNvSpPr txBox="1"/>
           <p:nvPr/>
         </p:nvSpPr>
@@ -20356,7 +20356,7 @@
       </p:sp>
       <p:sp>
         <p:nvSpPr>
-          <p:cNvPr id="5" name=""/>
+          <p:cNvPr id="5" name="Shape 5"/>
           <p:cNvSpPr txBox="1"/>
           <p:nvPr/>
         </p:nvSpPr>
@@ -20391,7 +20391,7 @@
       </p:sp>
       <p:pic>
         <p:nvPicPr>
-          <p:cNvPr id="6" name="" descr="logo_s.png"/>
+          <p:cNvPr id="6" name="Shape 6" descr="logo_s.png"/>
           <p:cNvPicPr>
             <a:picLocks noChangeAspect="1"/>
           </p:cNvPicPr>
@@ -20415,7 +20415,7 @@
       </p:pic>
       <p:sp>
         <p:nvSpPr>
-          <p:cNvPr id="7" name=""/>
+          <p:cNvPr id="7" name="Shape 7"/>
           <p:cNvSpPr/>
           <p:nvPr/>
         </p:nvSpPr>
@@ -20437,7 +20437,7 @@
       </p:sp>
       <p:sp>
         <p:nvSpPr>
-          <p:cNvPr id="8" name=""/>
+          <p:cNvPr id="8" name="Shape 8"/>
           <p:cNvSpPr txBox="1"/>
           <p:nvPr/>
         </p:nvSpPr>
@@ -20472,7 +20472,7 @@
       </p:sp>
       <p:sp>
         <p:nvSpPr>
-          <p:cNvPr id="9" name=""/>
+          <p:cNvPr id="9" name="Shape 9"/>
           <p:cNvSpPr txBox="1"/>
           <p:nvPr/>
         </p:nvSpPr>
@@ -20507,7 +20507,7 @@
       </p:sp>
       <p:sp>
         <p:nvSpPr>
-          <p:cNvPr id="10" name=""/>
+          <p:cNvPr id="10" name="Shape 10"/>
           <p:cNvSpPr/>
           <p:nvPr/>
         </p:nvSpPr>
@@ -20531,7 +20531,7 @@
       </p:sp>
       <p:sp>
         <p:nvSpPr>
-          <p:cNvPr id="11" name=""/>
+          <p:cNvPr id="11" name="Shape 11"/>
           <p:cNvSpPr txBox="1"/>
           <p:nvPr/>
         </p:nvSpPr>
@@ -20566,7 +20566,7 @@
       </p:sp>
       <p:sp>
         <p:nvSpPr>
-          <p:cNvPr id="12" name=""/>
+          <p:cNvPr id="12" name="Shape 12"/>
           <p:cNvSpPr txBox="1"/>
           <p:nvPr/>
         </p:nvSpPr>
@@ -20601,7 +20601,7 @@
       </p:sp>
       <p:sp>
         <p:nvSpPr>
-          <p:cNvPr id="13" name=""/>
+          <p:cNvPr id="13" name="Shape 13"/>
           <p:cNvSpPr txBox="1"/>
           <p:nvPr/>
         </p:nvSpPr>
@@ -20636,7 +20636,7 @@
       </p:sp>
       <p:sp>
         <p:nvSpPr>
-          <p:cNvPr id="14" name=""/>
+          <p:cNvPr id="14" name="Shape 14"/>
           <p:cNvSpPr/>
           <p:nvPr/>
         </p:nvSpPr>
@@ -20660,7 +20660,7 @@
       </p:sp>
       <p:sp>
         <p:nvSpPr>
-          <p:cNvPr id="15" name=""/>
+          <p:cNvPr id="15" name="Shape 15"/>
           <p:cNvSpPr txBox="1"/>
           <p:nvPr/>
         </p:nvSpPr>
@@ -20695,7 +20695,7 @@
       </p:sp>
       <p:sp>
         <p:nvSpPr>
-          <p:cNvPr id="16" name=""/>
+          <p:cNvPr id="16" name="Shape 16"/>
           <p:cNvSpPr txBox="1"/>
           <p:nvPr/>
         </p:nvSpPr>
@@ -20730,7 +20730,7 @@
       </p:sp>
       <p:sp>
         <p:nvSpPr>
-          <p:cNvPr id="17" name=""/>
+          <p:cNvPr id="17" name="Shape 17"/>
           <p:cNvSpPr txBox="1"/>
           <p:nvPr/>
         </p:nvSpPr>
@@ -20765,7 +20765,7 @@
       </p:sp>
       <p:sp>
         <p:nvSpPr>
-          <p:cNvPr id="18" name=""/>
+          <p:cNvPr id="18" name="Shape 18"/>
           <p:cNvSpPr/>
           <p:nvPr/>
         </p:nvSpPr>
@@ -20789,7 +20789,7 @@
       </p:sp>
       <p:sp>
         <p:nvSpPr>
-          <p:cNvPr id="19" name=""/>
+          <p:cNvPr id="19" name="Shape 19"/>
           <p:cNvSpPr txBox="1"/>
           <p:nvPr/>
         </p:nvSpPr>
@@ -20824,7 +20824,7 @@
       </p:sp>
       <p:sp>
         <p:nvSpPr>
-          <p:cNvPr id="20" name=""/>
+          <p:cNvPr id="20" name="Shape 20"/>
           <p:cNvSpPr txBox="1"/>
           <p:nvPr/>
         </p:nvSpPr>
@@ -20859,7 +20859,7 @@
       </p:sp>
       <p:sp>
         <p:nvSpPr>
-          <p:cNvPr id="21" name=""/>
+          <p:cNvPr id="21" name="Shape 21"/>
           <p:cNvSpPr txBox="1"/>
           <p:nvPr/>
         </p:nvSpPr>
@@ -20894,7 +20894,7 @@
       </p:sp>
       <p:sp>
         <p:nvSpPr>
-          <p:cNvPr id="22" name=""/>
+          <p:cNvPr id="22" name="Shape 22"/>
           <p:cNvSpPr/>
           <p:nvPr/>
         </p:nvSpPr>
@@ -20918,7 +20918,7 @@
       </p:sp>
       <p:sp>
         <p:nvSpPr>
-          <p:cNvPr id="23" name=""/>
+          <p:cNvPr id="23" name="Shape 23"/>
           <p:cNvSpPr txBox="1"/>
           <p:nvPr/>
         </p:nvSpPr>
@@ -20953,7 +20953,7 @@
       </p:sp>
       <p:sp>
         <p:nvSpPr>
-          <p:cNvPr id="24" name=""/>
+          <p:cNvPr id="24" name="Shape 24"/>
           <p:cNvSpPr txBox="1"/>
           <p:nvPr/>
         </p:nvSpPr>
@@ -20988,7 +20988,7 @@
       </p:sp>
       <p:sp>
         <p:nvSpPr>
-          <p:cNvPr id="25" name=""/>
+          <p:cNvPr id="25" name="Shape 25"/>
           <p:cNvSpPr txBox="1"/>
           <p:nvPr/>
         </p:nvSpPr>
@@ -21023,7 +21023,7 @@
       </p:sp>
       <p:graphicFrame>
         <p:nvGraphicFramePr>
-          <p:cNvPr id="26" name=""/>
+          <p:cNvPr id="26" name="Shape 26"/>
           <p:cNvGraphicFramePr>
             <a:graphicFrameLocks noGrp="1"/>
           </p:cNvGraphicFramePr>
@@ -22171,7 +22171,7 @@
       </p:graphicFrame>
       <p:sp>
         <p:nvSpPr>
-          <p:cNvPr id="27" name=""/>
+          <p:cNvPr id="27" name="Shape 27"/>
           <p:cNvSpPr/>
           <p:nvPr/>
         </p:nvSpPr>
@@ -22197,7 +22197,7 @@
       </p:sp>
       <p:sp>
         <p:nvSpPr>
-          <p:cNvPr id="28" name=""/>
+          <p:cNvPr id="28" name="Shape 28"/>
           <p:cNvSpPr txBox="1"/>
           <p:nvPr/>
         </p:nvSpPr>
@@ -22232,7 +22232,7 @@
       </p:sp>
       <p:sp>
         <p:nvSpPr>
-          <p:cNvPr id="29" name=""/>
+          <p:cNvPr id="29" name="Shape 29"/>
           <p:cNvSpPr txBox="1"/>
           <p:nvPr/>
         </p:nvSpPr>
@@ -22314,14 +22314,14 @@
   <p:cSld>
     <p:spTree>
       <p:nvGrpSpPr>
-        <p:cNvPr id="1" name=""/>
+        <p:cNvPr id="1" name="Shape 1"/>
         <p:cNvGrpSpPr/>
         <p:nvPr/>
       </p:nvGrpSpPr>
       <p:grpSpPr/>
       <p:sp>
         <p:nvSpPr>
-          <p:cNvPr id="2" name=""/>
+          <p:cNvPr id="2" name="Shape 2"/>
           <p:cNvSpPr/>
           <p:nvPr/>
         </p:nvSpPr>
@@ -22343,7 +22343,7 @@
       </p:sp>
       <p:sp>
         <p:nvSpPr>
-          <p:cNvPr id="3" name=""/>
+          <p:cNvPr id="3" name="Shape 3"/>
           <p:cNvSpPr/>
           <p:nvPr/>
         </p:nvSpPr>
@@ -22365,7 +22365,7 @@
       </p:sp>
       <p:sp>
         <p:nvSpPr>
-          <p:cNvPr id="4" name=""/>
+          <p:cNvPr id="4" name="Shape 4"/>
           <p:cNvSpPr txBox="1"/>
           <p:nvPr/>
         </p:nvSpPr>
@@ -22400,7 +22400,7 @@
       </p:sp>
       <p:sp>
         <p:nvSpPr>
-          <p:cNvPr id="5" name=""/>
+          <p:cNvPr id="5" name="Shape 5"/>
           <p:cNvSpPr txBox="1"/>
           <p:nvPr/>
         </p:nvSpPr>
@@ -22435,7 +22435,7 @@
       </p:sp>
       <p:pic>
         <p:nvPicPr>
-          <p:cNvPr id="6" name="" descr="logo_s.png"/>
+          <p:cNvPr id="6" name="Shape 6" descr="logo_s.png"/>
           <p:cNvPicPr>
             <a:picLocks noChangeAspect="1"/>
           </p:cNvPicPr>
@@ -22459,7 +22459,7 @@
       </p:pic>
       <p:sp>
         <p:nvSpPr>
-          <p:cNvPr id="7" name=""/>
+          <p:cNvPr id="7" name="Shape 7"/>
           <p:cNvSpPr/>
           <p:nvPr/>
         </p:nvSpPr>
@@ -22481,7 +22481,7 @@
       </p:sp>
       <p:sp>
         <p:nvSpPr>
-          <p:cNvPr id="8" name=""/>
+          <p:cNvPr id="8" name="Shape 8"/>
           <p:cNvSpPr txBox="1"/>
           <p:nvPr/>
         </p:nvSpPr>
@@ -22516,7 +22516,7 @@
       </p:sp>
       <p:sp>
         <p:nvSpPr>
-          <p:cNvPr id="9" name=""/>
+          <p:cNvPr id="9" name="Shape 9"/>
           <p:cNvSpPr txBox="1"/>
           <p:nvPr/>
         </p:nvSpPr>
@@ -22551,7 +22551,7 @@
       </p:sp>
       <p:sp>
         <p:nvSpPr>
-          <p:cNvPr id="10" name=""/>
+          <p:cNvPr id="10" name="Shape 10"/>
           <p:cNvSpPr/>
           <p:nvPr/>
         </p:nvSpPr>
@@ -22575,7 +22575,7 @@
       </p:sp>
       <p:sp>
         <p:nvSpPr>
-          <p:cNvPr id="11" name=""/>
+          <p:cNvPr id="11" name="Shape 11"/>
           <p:cNvSpPr txBox="1"/>
           <p:nvPr/>
         </p:nvSpPr>
@@ -22610,7 +22610,7 @@
       </p:sp>
       <p:sp>
         <p:nvSpPr>
-          <p:cNvPr id="12" name=""/>
+          <p:cNvPr id="12" name="Shape 12"/>
           <p:cNvSpPr txBox="1"/>
           <p:nvPr/>
         </p:nvSpPr>
@@ -22654,7 +22654,7 @@
       </p:sp>
       <p:sp>
         <p:nvSpPr>
-          <p:cNvPr id="13" name=""/>
+          <p:cNvPr id="13" name="Shape 13"/>
           <p:cNvSpPr/>
           <p:nvPr/>
         </p:nvSpPr>
@@ -22678,7 +22678,7 @@
       </p:sp>
       <p:sp>
         <p:nvSpPr>
-          <p:cNvPr id="14" name=""/>
+          <p:cNvPr id="14" name="Shape 14"/>
           <p:cNvSpPr txBox="1"/>
           <p:nvPr/>
         </p:nvSpPr>
@@ -22713,7 +22713,7 @@
       </p:sp>
       <p:sp>
         <p:nvSpPr>
-          <p:cNvPr id="15" name=""/>
+          <p:cNvPr id="15" name="Shape 15"/>
           <p:cNvSpPr txBox="1"/>
           <p:nvPr/>
         </p:nvSpPr>
@@ -22757,7 +22757,7 @@
       </p:sp>
       <p:sp>
         <p:nvSpPr>
-          <p:cNvPr id="16" name=""/>
+          <p:cNvPr id="16" name="Shape 16"/>
           <p:cNvSpPr/>
           <p:nvPr/>
         </p:nvSpPr>
@@ -22781,7 +22781,7 @@
       </p:sp>
       <p:sp>
         <p:nvSpPr>
-          <p:cNvPr id="17" name=""/>
+          <p:cNvPr id="17" name="Shape 17"/>
           <p:cNvSpPr txBox="1"/>
           <p:nvPr/>
         </p:nvSpPr>
@@ -22816,7 +22816,7 @@
       </p:sp>
       <p:sp>
         <p:nvSpPr>
-          <p:cNvPr id="18" name=""/>
+          <p:cNvPr id="18" name="Shape 18"/>
           <p:cNvSpPr txBox="1"/>
           <p:nvPr/>
         </p:nvSpPr>
@@ -22860,7 +22860,7 @@
       </p:sp>
       <p:sp>
         <p:nvSpPr>
-          <p:cNvPr id="19" name=""/>
+          <p:cNvPr id="19" name="Shape 19"/>
           <p:cNvSpPr/>
           <p:nvPr/>
         </p:nvSpPr>
@@ -22884,7 +22884,7 @@
       </p:sp>
       <p:sp>
         <p:nvSpPr>
-          <p:cNvPr id="20" name=""/>
+          <p:cNvPr id="20" name="Shape 20"/>
           <p:cNvSpPr txBox="1"/>
           <p:nvPr/>
         </p:nvSpPr>
@@ -22919,7 +22919,7 @@
       </p:sp>
       <p:sp>
         <p:nvSpPr>
-          <p:cNvPr id="21" name=""/>
+          <p:cNvPr id="21" name="Shape 21"/>
           <p:cNvSpPr txBox="1"/>
           <p:nvPr/>
         </p:nvSpPr>
@@ -22963,7 +22963,7 @@
       </p:sp>
       <p:sp>
         <p:nvSpPr>
-          <p:cNvPr id="22" name=""/>
+          <p:cNvPr id="22" name="Shape 22"/>
           <p:cNvSpPr/>
           <p:nvPr/>
         </p:nvSpPr>
@@ -22987,7 +22987,7 @@
       </p:sp>
       <p:sp>
         <p:nvSpPr>
-          <p:cNvPr id="23" name=""/>
+          <p:cNvPr id="23" name="Shape 23"/>
           <p:cNvSpPr txBox="1"/>
           <p:nvPr/>
         </p:nvSpPr>
@@ -23022,7 +23022,7 @@
       </p:sp>
       <p:sp>
         <p:nvSpPr>
-          <p:cNvPr id="24" name=""/>
+          <p:cNvPr id="24" name="Shape 24"/>
           <p:cNvSpPr txBox="1"/>
           <p:nvPr/>
         </p:nvSpPr>
@@ -23066,7 +23066,7 @@
       </p:sp>
       <p:sp>
         <p:nvSpPr>
-          <p:cNvPr id="25" name=""/>
+          <p:cNvPr id="25" name="Shape 25"/>
           <p:cNvSpPr/>
           <p:nvPr/>
         </p:nvSpPr>
@@ -23090,7 +23090,7 @@
       </p:sp>
       <p:sp>
         <p:nvSpPr>
-          <p:cNvPr id="26" name=""/>
+          <p:cNvPr id="26" name="Shape 26"/>
           <p:cNvSpPr txBox="1"/>
           <p:nvPr/>
         </p:nvSpPr>
@@ -23125,7 +23125,7 @@
       </p:sp>
       <p:sp>
         <p:nvSpPr>
-          <p:cNvPr id="27" name=""/>
+          <p:cNvPr id="27" name="Shape 27"/>
           <p:cNvSpPr txBox="1"/>
           <p:nvPr/>
         </p:nvSpPr>
@@ -23169,7 +23169,7 @@
       </p:sp>
       <p:graphicFrame>
         <p:nvGraphicFramePr>
-          <p:cNvPr id="28" name=""/>
+          <p:cNvPr id="28" name="Shape 28"/>
           <p:cNvGraphicFramePr>
             <a:graphicFrameLocks noGrp="1"/>
           </p:cNvGraphicFramePr>
@@ -25094,14 +25094,14 @@
   <p:cSld>
     <p:spTree>
       <p:nvGrpSpPr>
-        <p:cNvPr id="1" name=""/>
+        <p:cNvPr id="1" name="Shape 1"/>
         <p:cNvGrpSpPr/>
         <p:nvPr/>
       </p:nvGrpSpPr>
       <p:grpSpPr/>
       <p:sp>
         <p:nvSpPr>
-          <p:cNvPr id="2" name=""/>
+          <p:cNvPr id="2" name="Shape 2"/>
           <p:cNvSpPr/>
           <p:nvPr/>
         </p:nvSpPr>
@@ -25123,7 +25123,7 @@
       </p:sp>
       <p:sp>
         <p:nvSpPr>
-          <p:cNvPr id="3" name=""/>
+          <p:cNvPr id="3" name="Shape 3"/>
           <p:cNvSpPr/>
           <p:nvPr/>
         </p:nvSpPr>
@@ -25145,7 +25145,7 @@
       </p:sp>
       <p:sp>
         <p:nvSpPr>
-          <p:cNvPr id="4" name=""/>
+          <p:cNvPr id="4" name="Shape 4"/>
           <p:cNvSpPr txBox="1"/>
           <p:nvPr/>
         </p:nvSpPr>
@@ -25180,7 +25180,7 @@
       </p:sp>
       <p:sp>
         <p:nvSpPr>
-          <p:cNvPr id="5" name=""/>
+          <p:cNvPr id="5" name="Shape 5"/>
           <p:cNvSpPr txBox="1"/>
           <p:nvPr/>
         </p:nvSpPr>
@@ -25215,7 +25215,7 @@
       </p:sp>
       <p:pic>
         <p:nvPicPr>
-          <p:cNvPr id="6" name="" descr="logo_s.png"/>
+          <p:cNvPr id="6" name="Shape 6" descr="logo_s.png"/>
           <p:cNvPicPr>
             <a:picLocks noChangeAspect="1"/>
           </p:cNvPicPr>
@@ -25239,7 +25239,7 @@
       </p:pic>
       <p:sp>
         <p:nvSpPr>
-          <p:cNvPr id="7" name=""/>
+          <p:cNvPr id="7" name="Shape 7"/>
           <p:cNvSpPr/>
           <p:nvPr/>
         </p:nvSpPr>
@@ -25261,7 +25261,7 @@
       </p:sp>
       <p:sp>
         <p:nvSpPr>
-          <p:cNvPr id="8" name=""/>
+          <p:cNvPr id="8" name="Shape 8"/>
           <p:cNvSpPr txBox="1"/>
           <p:nvPr/>
         </p:nvSpPr>
@@ -25296,7 +25296,7 @@
       </p:sp>
       <p:sp>
         <p:nvSpPr>
-          <p:cNvPr id="9" name=""/>
+          <p:cNvPr id="9" name="Shape 9"/>
           <p:cNvSpPr txBox="1"/>
           <p:nvPr/>
         </p:nvSpPr>
@@ -25331,7 +25331,7 @@
       </p:sp>
       <p:graphicFrame>
         <p:nvGraphicFramePr>
-          <p:cNvPr id="10" name=""/>
+          <p:cNvPr id="10" name="Shape 10"/>
           <p:cNvGraphicFramePr>
             <a:graphicFrameLocks noGrp="1"/>
           </p:cNvGraphicFramePr>
@@ -26340,7 +26340,7 @@
       </p:graphicFrame>
       <p:sp>
         <p:nvSpPr>
-          <p:cNvPr id="11" name=""/>
+          <p:cNvPr id="11" name="Shape 11"/>
           <p:cNvSpPr txBox="1"/>
           <p:nvPr/>
         </p:nvSpPr>
